--- a/public/videos/repositories/asia-trip-concierge/asia-trip-concierge-tech-preview.pptx
+++ b/public/videos/repositories/asia-trip-concierge/asia-trip-concierge-tech-preview.pptx
@@ -134,7 +134,7 @@
           <p:cNvPr id="2" name="タイトル 1">
             <a:extLst>
               <a:ext uri="{FF2B5EF4-FFF2-40B4-BE49-F238E27FC236}">
-                <a16:creationId xmlns:a16="http://schemas.microsoft.com/office/drawing/2014/main" id="{B927FBF9-68D8-7413-3919-F27DE003D737}"/>
+                <a16:creationId xmlns:a16="http://schemas.microsoft.com/office/drawing/2014/main" id="{4400471B-3249-7658-13DF-2CD8031F6DDC}"/>
               </a:ext>
             </a:extLst>
           </p:cNvPr>
@@ -171,7 +171,7 @@
           <p:cNvPr id="3" name="字幕 2">
             <a:extLst>
               <a:ext uri="{FF2B5EF4-FFF2-40B4-BE49-F238E27FC236}">
-                <a16:creationId xmlns:a16="http://schemas.microsoft.com/office/drawing/2014/main" id="{1C2698AA-7AEB-ED2E-DE87-5E13A151496E}"/>
+                <a16:creationId xmlns:a16="http://schemas.microsoft.com/office/drawing/2014/main" id="{29B28672-7342-6610-28A7-55866BCA6911}"/>
               </a:ext>
             </a:extLst>
           </p:cNvPr>
@@ -241,7 +241,7 @@
           <p:cNvPr id="4" name="日付プレースホルダー 3">
             <a:extLst>
               <a:ext uri="{FF2B5EF4-FFF2-40B4-BE49-F238E27FC236}">
-                <a16:creationId xmlns:a16="http://schemas.microsoft.com/office/drawing/2014/main" id="{75EE05E2-A882-D87E-3C3F-67DF8D97D12A}"/>
+                <a16:creationId xmlns:a16="http://schemas.microsoft.com/office/drawing/2014/main" id="{FEC8FDD2-1386-7C99-8420-143AEC9655F6}"/>
               </a:ext>
             </a:extLst>
           </p:cNvPr>
@@ -257,7 +257,7 @@
           <a:bodyPr/>
           <a:lstStyle/>
           <a:p>
-            <a:fld id="{50938B6C-5D5A-46E3-8523-470594EB007B}" type="datetimeFigureOut">
+            <a:fld id="{69EFDE8D-40B8-48E0-BD24-41E6F9DECD80}" type="datetimeFigureOut">
               <a:rPr kumimoji="1" lang="ja-JP" altLang="en-US" smtClean="0"/>
               <a:t>2026/7/30</a:t>
             </a:fld>
@@ -270,7 +270,7 @@
           <p:cNvPr id="5" name="フッター プレースホルダー 4">
             <a:extLst>
               <a:ext uri="{FF2B5EF4-FFF2-40B4-BE49-F238E27FC236}">
-                <a16:creationId xmlns:a16="http://schemas.microsoft.com/office/drawing/2014/main" id="{4364397B-7EFD-9DC5-DE36-1727633DEAD7}"/>
+                <a16:creationId xmlns:a16="http://schemas.microsoft.com/office/drawing/2014/main" id="{565B2E67-C32D-24C6-EBEA-14D6667300CD}"/>
               </a:ext>
             </a:extLst>
           </p:cNvPr>
@@ -295,7 +295,7 @@
           <p:cNvPr id="6" name="スライド番号プレースホルダー 5">
             <a:extLst>
               <a:ext uri="{FF2B5EF4-FFF2-40B4-BE49-F238E27FC236}">
-                <a16:creationId xmlns:a16="http://schemas.microsoft.com/office/drawing/2014/main" id="{247E1014-4C33-290E-7784-7A3521ECB0AD}"/>
+                <a16:creationId xmlns:a16="http://schemas.microsoft.com/office/drawing/2014/main" id="{8C0D1061-7A34-2E49-7400-610D59AB209F}"/>
               </a:ext>
             </a:extLst>
           </p:cNvPr>
@@ -311,7 +311,7 @@
           <a:bodyPr/>
           <a:lstStyle/>
           <a:p>
-            <a:fld id="{08944CC7-50C9-4B3B-9FE1-C07F1676EBBF}" type="slidenum">
+            <a:fld id="{043EC55A-0D47-41B3-AD36-51B34E2480AE}" type="slidenum">
               <a:rPr kumimoji="1" lang="ja-JP" altLang="en-US" smtClean="0"/>
               <a:t>‹#›</a:t>
             </a:fld>
@@ -322,7 +322,7 @@
     </p:spTree>
     <p:extLst>
       <p:ext uri="{BB962C8B-B14F-4D97-AF65-F5344CB8AC3E}">
-        <p14:creationId xmlns:p14="http://schemas.microsoft.com/office/powerpoint/2010/main" val="554077403"/>
+        <p14:creationId xmlns:p14="http://schemas.microsoft.com/office/powerpoint/2010/main" val="3159825193"/>
       </p:ext>
     </p:extLst>
   </p:cSld>
@@ -354,7 +354,7 @@
           <p:cNvPr id="2" name="タイトル 1">
             <a:extLst>
               <a:ext uri="{FF2B5EF4-FFF2-40B4-BE49-F238E27FC236}">
-                <a16:creationId xmlns:a16="http://schemas.microsoft.com/office/drawing/2014/main" id="{3EAF2D2B-1509-74CE-15BE-625B7AEFCFFF}"/>
+                <a16:creationId xmlns:a16="http://schemas.microsoft.com/office/drawing/2014/main" id="{4A562BA1-0359-F994-AD4E-A63CB30BAAAA}"/>
               </a:ext>
             </a:extLst>
           </p:cNvPr>
@@ -382,7 +382,7 @@
           <p:cNvPr id="3" name="縦書きテキスト プレースホルダー 2">
             <a:extLst>
               <a:ext uri="{FF2B5EF4-FFF2-40B4-BE49-F238E27FC236}">
-                <a16:creationId xmlns:a16="http://schemas.microsoft.com/office/drawing/2014/main" id="{A5993C32-342C-691A-D104-ED37B666A7C4}"/>
+                <a16:creationId xmlns:a16="http://schemas.microsoft.com/office/drawing/2014/main" id="{A27421C4-AB48-170E-6EA9-AB22955CA7DA}"/>
               </a:ext>
             </a:extLst>
           </p:cNvPr>
@@ -471,7 +471,7 @@
           <p:cNvPr id="4" name="日付プレースホルダー 3">
             <a:extLst>
               <a:ext uri="{FF2B5EF4-FFF2-40B4-BE49-F238E27FC236}">
-                <a16:creationId xmlns:a16="http://schemas.microsoft.com/office/drawing/2014/main" id="{70F07FD3-64D3-E86A-C1C7-FBD40B920A32}"/>
+                <a16:creationId xmlns:a16="http://schemas.microsoft.com/office/drawing/2014/main" id="{2F1090D5-16D3-DF16-2965-11024CFD56FC}"/>
               </a:ext>
             </a:extLst>
           </p:cNvPr>
@@ -487,7 +487,7 @@
           <a:bodyPr/>
           <a:lstStyle/>
           <a:p>
-            <a:fld id="{50938B6C-5D5A-46E3-8523-470594EB007B}" type="datetimeFigureOut">
+            <a:fld id="{69EFDE8D-40B8-48E0-BD24-41E6F9DECD80}" type="datetimeFigureOut">
               <a:rPr kumimoji="1" lang="ja-JP" altLang="en-US" smtClean="0"/>
               <a:t>2026/7/30</a:t>
             </a:fld>
@@ -500,7 +500,7 @@
           <p:cNvPr id="5" name="フッター プレースホルダー 4">
             <a:extLst>
               <a:ext uri="{FF2B5EF4-FFF2-40B4-BE49-F238E27FC236}">
-                <a16:creationId xmlns:a16="http://schemas.microsoft.com/office/drawing/2014/main" id="{59E8F3FB-CCF7-0A86-0A3B-DAD7E7C4F060}"/>
+                <a16:creationId xmlns:a16="http://schemas.microsoft.com/office/drawing/2014/main" id="{12C8BDE6-A1F4-3AD9-7A87-370ADCA67E93}"/>
               </a:ext>
             </a:extLst>
           </p:cNvPr>
@@ -525,7 +525,7 @@
           <p:cNvPr id="6" name="スライド番号プレースホルダー 5">
             <a:extLst>
               <a:ext uri="{FF2B5EF4-FFF2-40B4-BE49-F238E27FC236}">
-                <a16:creationId xmlns:a16="http://schemas.microsoft.com/office/drawing/2014/main" id="{A32DF847-2652-3F23-85BA-616077ABC3F9}"/>
+                <a16:creationId xmlns:a16="http://schemas.microsoft.com/office/drawing/2014/main" id="{F20B78E1-0C5B-7091-0840-C98056DF6B6E}"/>
               </a:ext>
             </a:extLst>
           </p:cNvPr>
@@ -541,7 +541,7 @@
           <a:bodyPr/>
           <a:lstStyle/>
           <a:p>
-            <a:fld id="{08944CC7-50C9-4B3B-9FE1-C07F1676EBBF}" type="slidenum">
+            <a:fld id="{043EC55A-0D47-41B3-AD36-51B34E2480AE}" type="slidenum">
               <a:rPr kumimoji="1" lang="ja-JP" altLang="en-US" smtClean="0"/>
               <a:t>‹#›</a:t>
             </a:fld>
@@ -552,7 +552,7 @@
     </p:spTree>
     <p:extLst>
       <p:ext uri="{BB962C8B-B14F-4D97-AF65-F5344CB8AC3E}">
-        <p14:creationId xmlns:p14="http://schemas.microsoft.com/office/powerpoint/2010/main" val="46564610"/>
+        <p14:creationId xmlns:p14="http://schemas.microsoft.com/office/powerpoint/2010/main" val="61684995"/>
       </p:ext>
     </p:extLst>
   </p:cSld>
@@ -584,7 +584,7 @@
           <p:cNvPr id="2" name="縦書きタイトル 1">
             <a:extLst>
               <a:ext uri="{FF2B5EF4-FFF2-40B4-BE49-F238E27FC236}">
-                <a16:creationId xmlns:a16="http://schemas.microsoft.com/office/drawing/2014/main" id="{FF7B895F-9D3E-397B-427D-8B5ED3A927C3}"/>
+                <a16:creationId xmlns:a16="http://schemas.microsoft.com/office/drawing/2014/main" id="{DFB4A03A-D8F5-5F5F-EE09-FDE5267E0F7C}"/>
               </a:ext>
             </a:extLst>
           </p:cNvPr>
@@ -617,7 +617,7 @@
           <p:cNvPr id="3" name="縦書きテキスト プレースホルダー 2">
             <a:extLst>
               <a:ext uri="{FF2B5EF4-FFF2-40B4-BE49-F238E27FC236}">
-                <a16:creationId xmlns:a16="http://schemas.microsoft.com/office/drawing/2014/main" id="{E09EF00C-F420-1149-4D10-AED9A78D4412}"/>
+                <a16:creationId xmlns:a16="http://schemas.microsoft.com/office/drawing/2014/main" id="{E892D83B-A2D0-62CD-941F-B101027F5A76}"/>
               </a:ext>
             </a:extLst>
           </p:cNvPr>
@@ -711,7 +711,7 @@
           <p:cNvPr id="4" name="日付プレースホルダー 3">
             <a:extLst>
               <a:ext uri="{FF2B5EF4-FFF2-40B4-BE49-F238E27FC236}">
-                <a16:creationId xmlns:a16="http://schemas.microsoft.com/office/drawing/2014/main" id="{B8D58EF0-7E1A-47DA-47AD-B0910C0D27F0}"/>
+                <a16:creationId xmlns:a16="http://schemas.microsoft.com/office/drawing/2014/main" id="{8FF8ACED-AE1A-98AC-D0B6-93D45052F670}"/>
               </a:ext>
             </a:extLst>
           </p:cNvPr>
@@ -727,7 +727,7 @@
           <a:bodyPr/>
           <a:lstStyle/>
           <a:p>
-            <a:fld id="{50938B6C-5D5A-46E3-8523-470594EB007B}" type="datetimeFigureOut">
+            <a:fld id="{69EFDE8D-40B8-48E0-BD24-41E6F9DECD80}" type="datetimeFigureOut">
               <a:rPr kumimoji="1" lang="ja-JP" altLang="en-US" smtClean="0"/>
               <a:t>2026/7/30</a:t>
             </a:fld>
@@ -740,7 +740,7 @@
           <p:cNvPr id="5" name="フッター プレースホルダー 4">
             <a:extLst>
               <a:ext uri="{FF2B5EF4-FFF2-40B4-BE49-F238E27FC236}">
-                <a16:creationId xmlns:a16="http://schemas.microsoft.com/office/drawing/2014/main" id="{C2B72AC0-1207-2B42-F6BE-BA4E0B886F44}"/>
+                <a16:creationId xmlns:a16="http://schemas.microsoft.com/office/drawing/2014/main" id="{648D62C3-F4EB-864E-DC84-70439A6803D7}"/>
               </a:ext>
             </a:extLst>
           </p:cNvPr>
@@ -765,7 +765,7 @@
           <p:cNvPr id="6" name="スライド番号プレースホルダー 5">
             <a:extLst>
               <a:ext uri="{FF2B5EF4-FFF2-40B4-BE49-F238E27FC236}">
-                <a16:creationId xmlns:a16="http://schemas.microsoft.com/office/drawing/2014/main" id="{82D707A7-43CF-632E-A53D-020CD9BF6A20}"/>
+                <a16:creationId xmlns:a16="http://schemas.microsoft.com/office/drawing/2014/main" id="{1870D552-3DE4-CFD6-6244-0B89B64F7006}"/>
               </a:ext>
             </a:extLst>
           </p:cNvPr>
@@ -781,7 +781,7 @@
           <a:bodyPr/>
           <a:lstStyle/>
           <a:p>
-            <a:fld id="{08944CC7-50C9-4B3B-9FE1-C07F1676EBBF}" type="slidenum">
+            <a:fld id="{043EC55A-0D47-41B3-AD36-51B34E2480AE}" type="slidenum">
               <a:rPr kumimoji="1" lang="ja-JP" altLang="en-US" smtClean="0"/>
               <a:t>‹#›</a:t>
             </a:fld>
@@ -792,7 +792,7 @@
     </p:spTree>
     <p:extLst>
       <p:ext uri="{BB962C8B-B14F-4D97-AF65-F5344CB8AC3E}">
-        <p14:creationId xmlns:p14="http://schemas.microsoft.com/office/powerpoint/2010/main" val="3326566312"/>
+        <p14:creationId xmlns:p14="http://schemas.microsoft.com/office/powerpoint/2010/main" val="1206013713"/>
       </p:ext>
     </p:extLst>
   </p:cSld>
@@ -824,7 +824,7 @@
           <p:cNvPr id="2" name="タイトル 1">
             <a:extLst>
               <a:ext uri="{FF2B5EF4-FFF2-40B4-BE49-F238E27FC236}">
-                <a16:creationId xmlns:a16="http://schemas.microsoft.com/office/drawing/2014/main" id="{12EC5B1C-3C32-2F5D-6DAD-97BF00598895}"/>
+                <a16:creationId xmlns:a16="http://schemas.microsoft.com/office/drawing/2014/main" id="{F072FB78-40E3-167C-BF5F-9FD11456C455}"/>
               </a:ext>
             </a:extLst>
           </p:cNvPr>
@@ -852,7 +852,7 @@
           <p:cNvPr id="3" name="コンテンツ プレースホルダー 2">
             <a:extLst>
               <a:ext uri="{FF2B5EF4-FFF2-40B4-BE49-F238E27FC236}">
-                <a16:creationId xmlns:a16="http://schemas.microsoft.com/office/drawing/2014/main" id="{CA70300A-D9A1-25EB-696B-DE1DE0E14A1C}"/>
+                <a16:creationId xmlns:a16="http://schemas.microsoft.com/office/drawing/2014/main" id="{0BA8F228-2670-7F67-B9FA-8B86B0DC52C6}"/>
               </a:ext>
             </a:extLst>
           </p:cNvPr>
@@ -941,7 +941,7 @@
           <p:cNvPr id="4" name="日付プレースホルダー 3">
             <a:extLst>
               <a:ext uri="{FF2B5EF4-FFF2-40B4-BE49-F238E27FC236}">
-                <a16:creationId xmlns:a16="http://schemas.microsoft.com/office/drawing/2014/main" id="{4B123A75-84A5-E8E7-F094-306AD56BC737}"/>
+                <a16:creationId xmlns:a16="http://schemas.microsoft.com/office/drawing/2014/main" id="{C47C5708-791A-66AC-7789-B01F1D7AA71B}"/>
               </a:ext>
             </a:extLst>
           </p:cNvPr>
@@ -957,7 +957,7 @@
           <a:bodyPr/>
           <a:lstStyle/>
           <a:p>
-            <a:fld id="{50938B6C-5D5A-46E3-8523-470594EB007B}" type="datetimeFigureOut">
+            <a:fld id="{69EFDE8D-40B8-48E0-BD24-41E6F9DECD80}" type="datetimeFigureOut">
               <a:rPr kumimoji="1" lang="ja-JP" altLang="en-US" smtClean="0"/>
               <a:t>2026/7/30</a:t>
             </a:fld>
@@ -970,7 +970,7 @@
           <p:cNvPr id="5" name="フッター プレースホルダー 4">
             <a:extLst>
               <a:ext uri="{FF2B5EF4-FFF2-40B4-BE49-F238E27FC236}">
-                <a16:creationId xmlns:a16="http://schemas.microsoft.com/office/drawing/2014/main" id="{5F62119B-BCDB-B655-5797-AD50E1B8F4D4}"/>
+                <a16:creationId xmlns:a16="http://schemas.microsoft.com/office/drawing/2014/main" id="{323E5484-B4E3-68DF-22B5-55663E24E493}"/>
               </a:ext>
             </a:extLst>
           </p:cNvPr>
@@ -995,7 +995,7 @@
           <p:cNvPr id="6" name="スライド番号プレースホルダー 5">
             <a:extLst>
               <a:ext uri="{FF2B5EF4-FFF2-40B4-BE49-F238E27FC236}">
-                <a16:creationId xmlns:a16="http://schemas.microsoft.com/office/drawing/2014/main" id="{F403F408-2298-210A-D6C9-4629CACF137B}"/>
+                <a16:creationId xmlns:a16="http://schemas.microsoft.com/office/drawing/2014/main" id="{85D8B2D1-A6F3-AA73-1D3A-744BE742F3C9}"/>
               </a:ext>
             </a:extLst>
           </p:cNvPr>
@@ -1011,7 +1011,7 @@
           <a:bodyPr/>
           <a:lstStyle/>
           <a:p>
-            <a:fld id="{08944CC7-50C9-4B3B-9FE1-C07F1676EBBF}" type="slidenum">
+            <a:fld id="{043EC55A-0D47-41B3-AD36-51B34E2480AE}" type="slidenum">
               <a:rPr kumimoji="1" lang="ja-JP" altLang="en-US" smtClean="0"/>
               <a:t>‹#›</a:t>
             </a:fld>
@@ -1022,7 +1022,7 @@
     </p:spTree>
     <p:extLst>
       <p:ext uri="{BB962C8B-B14F-4D97-AF65-F5344CB8AC3E}">
-        <p14:creationId xmlns:p14="http://schemas.microsoft.com/office/powerpoint/2010/main" val="4111465450"/>
+        <p14:creationId xmlns:p14="http://schemas.microsoft.com/office/powerpoint/2010/main" val="917589918"/>
       </p:ext>
     </p:extLst>
   </p:cSld>
@@ -1054,7 +1054,7 @@
           <p:cNvPr id="2" name="タイトル 1">
             <a:extLst>
               <a:ext uri="{FF2B5EF4-FFF2-40B4-BE49-F238E27FC236}">
-                <a16:creationId xmlns:a16="http://schemas.microsoft.com/office/drawing/2014/main" id="{9854CFF3-C42B-3291-7E73-36612B920251}"/>
+                <a16:creationId xmlns:a16="http://schemas.microsoft.com/office/drawing/2014/main" id="{653552CC-5E23-0E43-FCF0-50F998F78914}"/>
               </a:ext>
             </a:extLst>
           </p:cNvPr>
@@ -1091,7 +1091,7 @@
           <p:cNvPr id="3" name="テキスト プレースホルダー 2">
             <a:extLst>
               <a:ext uri="{FF2B5EF4-FFF2-40B4-BE49-F238E27FC236}">
-                <a16:creationId xmlns:a16="http://schemas.microsoft.com/office/drawing/2014/main" id="{63FCC786-0269-41D4-7D8F-95E3A6D0DADA}"/>
+                <a16:creationId xmlns:a16="http://schemas.microsoft.com/office/drawing/2014/main" id="{11DDECE3-3C83-05E7-D52F-0DE3F0507C30}"/>
               </a:ext>
             </a:extLst>
           </p:cNvPr>
@@ -1216,7 +1216,7 @@
           <p:cNvPr id="4" name="日付プレースホルダー 3">
             <a:extLst>
               <a:ext uri="{FF2B5EF4-FFF2-40B4-BE49-F238E27FC236}">
-                <a16:creationId xmlns:a16="http://schemas.microsoft.com/office/drawing/2014/main" id="{33E60CB5-53F7-31F5-FEFB-3255F64CCE36}"/>
+                <a16:creationId xmlns:a16="http://schemas.microsoft.com/office/drawing/2014/main" id="{8B9BA4C7-002A-9FE6-D34E-BE9D97D9F52F}"/>
               </a:ext>
             </a:extLst>
           </p:cNvPr>
@@ -1232,7 +1232,7 @@
           <a:bodyPr/>
           <a:lstStyle/>
           <a:p>
-            <a:fld id="{50938B6C-5D5A-46E3-8523-470594EB007B}" type="datetimeFigureOut">
+            <a:fld id="{69EFDE8D-40B8-48E0-BD24-41E6F9DECD80}" type="datetimeFigureOut">
               <a:rPr kumimoji="1" lang="ja-JP" altLang="en-US" smtClean="0"/>
               <a:t>2026/7/30</a:t>
             </a:fld>
@@ -1245,7 +1245,7 @@
           <p:cNvPr id="5" name="フッター プレースホルダー 4">
             <a:extLst>
               <a:ext uri="{FF2B5EF4-FFF2-40B4-BE49-F238E27FC236}">
-                <a16:creationId xmlns:a16="http://schemas.microsoft.com/office/drawing/2014/main" id="{8D59B354-BB95-FE88-882D-30E1C1CEE8B4}"/>
+                <a16:creationId xmlns:a16="http://schemas.microsoft.com/office/drawing/2014/main" id="{13856CE7-0D12-636C-9D72-7DDF3A8BCC9F}"/>
               </a:ext>
             </a:extLst>
           </p:cNvPr>
@@ -1270,7 +1270,7 @@
           <p:cNvPr id="6" name="スライド番号プレースホルダー 5">
             <a:extLst>
               <a:ext uri="{FF2B5EF4-FFF2-40B4-BE49-F238E27FC236}">
-                <a16:creationId xmlns:a16="http://schemas.microsoft.com/office/drawing/2014/main" id="{83F31119-2775-3A22-55E1-2D036B90EBAB}"/>
+                <a16:creationId xmlns:a16="http://schemas.microsoft.com/office/drawing/2014/main" id="{3400108D-D91C-F95D-371C-02726F6A4275}"/>
               </a:ext>
             </a:extLst>
           </p:cNvPr>
@@ -1286,7 +1286,7 @@
           <a:bodyPr/>
           <a:lstStyle/>
           <a:p>
-            <a:fld id="{08944CC7-50C9-4B3B-9FE1-C07F1676EBBF}" type="slidenum">
+            <a:fld id="{043EC55A-0D47-41B3-AD36-51B34E2480AE}" type="slidenum">
               <a:rPr kumimoji="1" lang="ja-JP" altLang="en-US" smtClean="0"/>
               <a:t>‹#›</a:t>
             </a:fld>
@@ -1297,7 +1297,7 @@
     </p:spTree>
     <p:extLst>
       <p:ext uri="{BB962C8B-B14F-4D97-AF65-F5344CB8AC3E}">
-        <p14:creationId xmlns:p14="http://schemas.microsoft.com/office/powerpoint/2010/main" val="2792109909"/>
+        <p14:creationId xmlns:p14="http://schemas.microsoft.com/office/powerpoint/2010/main" val="3130119826"/>
       </p:ext>
     </p:extLst>
   </p:cSld>
@@ -1329,7 +1329,7 @@
           <p:cNvPr id="2" name="タイトル 1">
             <a:extLst>
               <a:ext uri="{FF2B5EF4-FFF2-40B4-BE49-F238E27FC236}">
-                <a16:creationId xmlns:a16="http://schemas.microsoft.com/office/drawing/2014/main" id="{5C2AB56D-D8F1-C8AD-40CC-DC778C81F487}"/>
+                <a16:creationId xmlns:a16="http://schemas.microsoft.com/office/drawing/2014/main" id="{4E35C0E5-4CA9-A96B-2316-C956799AC777}"/>
               </a:ext>
             </a:extLst>
           </p:cNvPr>
@@ -1357,7 +1357,7 @@
           <p:cNvPr id="3" name="コンテンツ プレースホルダー 2">
             <a:extLst>
               <a:ext uri="{FF2B5EF4-FFF2-40B4-BE49-F238E27FC236}">
-                <a16:creationId xmlns:a16="http://schemas.microsoft.com/office/drawing/2014/main" id="{651C7243-3236-B70F-F6CC-6755C3F62BA4}"/>
+                <a16:creationId xmlns:a16="http://schemas.microsoft.com/office/drawing/2014/main" id="{0E7C261C-5C56-97CB-3F4D-64EEF38679E3}"/>
               </a:ext>
             </a:extLst>
           </p:cNvPr>
@@ -1451,7 +1451,7 @@
           <p:cNvPr id="4" name="コンテンツ プレースホルダー 3">
             <a:extLst>
               <a:ext uri="{FF2B5EF4-FFF2-40B4-BE49-F238E27FC236}">
-                <a16:creationId xmlns:a16="http://schemas.microsoft.com/office/drawing/2014/main" id="{453230A0-1D38-BA98-5EE5-3E1610B1CD19}"/>
+                <a16:creationId xmlns:a16="http://schemas.microsoft.com/office/drawing/2014/main" id="{87D96402-3714-19F1-9ECF-730C3B9AB4C9}"/>
               </a:ext>
             </a:extLst>
           </p:cNvPr>
@@ -1545,7 +1545,7 @@
           <p:cNvPr id="5" name="日付プレースホルダー 4">
             <a:extLst>
               <a:ext uri="{FF2B5EF4-FFF2-40B4-BE49-F238E27FC236}">
-                <a16:creationId xmlns:a16="http://schemas.microsoft.com/office/drawing/2014/main" id="{49842EEC-FE51-2DE9-C663-B098357A57DF}"/>
+                <a16:creationId xmlns:a16="http://schemas.microsoft.com/office/drawing/2014/main" id="{D469FC8F-24E7-B71B-59D5-04F54129B70F}"/>
               </a:ext>
             </a:extLst>
           </p:cNvPr>
@@ -1561,7 +1561,7 @@
           <a:bodyPr/>
           <a:lstStyle/>
           <a:p>
-            <a:fld id="{50938B6C-5D5A-46E3-8523-470594EB007B}" type="datetimeFigureOut">
+            <a:fld id="{69EFDE8D-40B8-48E0-BD24-41E6F9DECD80}" type="datetimeFigureOut">
               <a:rPr kumimoji="1" lang="ja-JP" altLang="en-US" smtClean="0"/>
               <a:t>2026/7/30</a:t>
             </a:fld>
@@ -1574,7 +1574,7 @@
           <p:cNvPr id="6" name="フッター プレースホルダー 5">
             <a:extLst>
               <a:ext uri="{FF2B5EF4-FFF2-40B4-BE49-F238E27FC236}">
-                <a16:creationId xmlns:a16="http://schemas.microsoft.com/office/drawing/2014/main" id="{0E5B0263-4F1D-2EB6-6603-D116175ED997}"/>
+                <a16:creationId xmlns:a16="http://schemas.microsoft.com/office/drawing/2014/main" id="{3F413464-609A-5CAA-B0E1-09A88AC77338}"/>
               </a:ext>
             </a:extLst>
           </p:cNvPr>
@@ -1599,7 +1599,7 @@
           <p:cNvPr id="7" name="スライド番号プレースホルダー 6">
             <a:extLst>
               <a:ext uri="{FF2B5EF4-FFF2-40B4-BE49-F238E27FC236}">
-                <a16:creationId xmlns:a16="http://schemas.microsoft.com/office/drawing/2014/main" id="{B14911DE-5FBC-800D-0BCE-1EED74CB9FE3}"/>
+                <a16:creationId xmlns:a16="http://schemas.microsoft.com/office/drawing/2014/main" id="{0B0B9EC4-BE96-542B-52BB-D69D10147AE9}"/>
               </a:ext>
             </a:extLst>
           </p:cNvPr>
@@ -1615,7 +1615,7 @@
           <a:bodyPr/>
           <a:lstStyle/>
           <a:p>
-            <a:fld id="{08944CC7-50C9-4B3B-9FE1-C07F1676EBBF}" type="slidenum">
+            <a:fld id="{043EC55A-0D47-41B3-AD36-51B34E2480AE}" type="slidenum">
               <a:rPr kumimoji="1" lang="ja-JP" altLang="en-US" smtClean="0"/>
               <a:t>‹#›</a:t>
             </a:fld>
@@ -1626,7 +1626,7 @@
     </p:spTree>
     <p:extLst>
       <p:ext uri="{BB962C8B-B14F-4D97-AF65-F5344CB8AC3E}">
-        <p14:creationId xmlns:p14="http://schemas.microsoft.com/office/powerpoint/2010/main" val="2456060864"/>
+        <p14:creationId xmlns:p14="http://schemas.microsoft.com/office/powerpoint/2010/main" val="1600938114"/>
       </p:ext>
     </p:extLst>
   </p:cSld>
@@ -1658,7 +1658,7 @@
           <p:cNvPr id="2" name="タイトル 1">
             <a:extLst>
               <a:ext uri="{FF2B5EF4-FFF2-40B4-BE49-F238E27FC236}">
-                <a16:creationId xmlns:a16="http://schemas.microsoft.com/office/drawing/2014/main" id="{5598CC84-DCCA-3051-4A1C-6F81F1FEDD56}"/>
+                <a16:creationId xmlns:a16="http://schemas.microsoft.com/office/drawing/2014/main" id="{BF659EBC-B30D-1990-597D-872008494244}"/>
               </a:ext>
             </a:extLst>
           </p:cNvPr>
@@ -1691,7 +1691,7 @@
           <p:cNvPr id="3" name="テキスト プレースホルダー 2">
             <a:extLst>
               <a:ext uri="{FF2B5EF4-FFF2-40B4-BE49-F238E27FC236}">
-                <a16:creationId xmlns:a16="http://schemas.microsoft.com/office/drawing/2014/main" id="{46338DC9-7210-2708-92DF-4AF01E03118C}"/>
+                <a16:creationId xmlns:a16="http://schemas.microsoft.com/office/drawing/2014/main" id="{C07C5B29-324D-B24B-5085-DBD5B4A8FFE5}"/>
               </a:ext>
             </a:extLst>
           </p:cNvPr>
@@ -1762,7 +1762,7 @@
           <p:cNvPr id="4" name="コンテンツ プレースホルダー 3">
             <a:extLst>
               <a:ext uri="{FF2B5EF4-FFF2-40B4-BE49-F238E27FC236}">
-                <a16:creationId xmlns:a16="http://schemas.microsoft.com/office/drawing/2014/main" id="{77EAB356-F4FA-C975-184C-23FFC135611A}"/>
+                <a16:creationId xmlns:a16="http://schemas.microsoft.com/office/drawing/2014/main" id="{8AC20A93-A47C-680F-9B2F-6825F8BBFD7C}"/>
               </a:ext>
             </a:extLst>
           </p:cNvPr>
@@ -1856,7 +1856,7 @@
           <p:cNvPr id="5" name="テキスト プレースホルダー 4">
             <a:extLst>
               <a:ext uri="{FF2B5EF4-FFF2-40B4-BE49-F238E27FC236}">
-                <a16:creationId xmlns:a16="http://schemas.microsoft.com/office/drawing/2014/main" id="{F994F6E8-4560-DE25-62B0-3232644969E4}"/>
+                <a16:creationId xmlns:a16="http://schemas.microsoft.com/office/drawing/2014/main" id="{3CEF6AC2-4E21-AC7D-2AAA-EBFD4050FDDD}"/>
               </a:ext>
             </a:extLst>
           </p:cNvPr>
@@ -1927,7 +1927,7 @@
           <p:cNvPr id="6" name="コンテンツ プレースホルダー 5">
             <a:extLst>
               <a:ext uri="{FF2B5EF4-FFF2-40B4-BE49-F238E27FC236}">
-                <a16:creationId xmlns:a16="http://schemas.microsoft.com/office/drawing/2014/main" id="{6FCA2174-98B6-A46B-0FB2-29CB97B83383}"/>
+                <a16:creationId xmlns:a16="http://schemas.microsoft.com/office/drawing/2014/main" id="{B935AF05-C7FA-D67E-1598-E4E4AE07A08A}"/>
               </a:ext>
             </a:extLst>
           </p:cNvPr>
@@ -2021,7 +2021,7 @@
           <p:cNvPr id="7" name="日付プレースホルダー 6">
             <a:extLst>
               <a:ext uri="{FF2B5EF4-FFF2-40B4-BE49-F238E27FC236}">
-                <a16:creationId xmlns:a16="http://schemas.microsoft.com/office/drawing/2014/main" id="{272DEF77-4663-F8F8-D462-44BEBEDF91E1}"/>
+                <a16:creationId xmlns:a16="http://schemas.microsoft.com/office/drawing/2014/main" id="{066315F7-1201-6FEB-A0F2-C7EC25558C34}"/>
               </a:ext>
             </a:extLst>
           </p:cNvPr>
@@ -2037,7 +2037,7 @@
           <a:bodyPr/>
           <a:lstStyle/>
           <a:p>
-            <a:fld id="{50938B6C-5D5A-46E3-8523-470594EB007B}" type="datetimeFigureOut">
+            <a:fld id="{69EFDE8D-40B8-48E0-BD24-41E6F9DECD80}" type="datetimeFigureOut">
               <a:rPr kumimoji="1" lang="ja-JP" altLang="en-US" smtClean="0"/>
               <a:t>2026/7/30</a:t>
             </a:fld>
@@ -2050,7 +2050,7 @@
           <p:cNvPr id="8" name="フッター プレースホルダー 7">
             <a:extLst>
               <a:ext uri="{FF2B5EF4-FFF2-40B4-BE49-F238E27FC236}">
-                <a16:creationId xmlns:a16="http://schemas.microsoft.com/office/drawing/2014/main" id="{9A8D31C1-7F48-6DDC-8EA8-6EBCECE17E2C}"/>
+                <a16:creationId xmlns:a16="http://schemas.microsoft.com/office/drawing/2014/main" id="{7DED79F8-A602-CC04-73B1-BCFAFA58D646}"/>
               </a:ext>
             </a:extLst>
           </p:cNvPr>
@@ -2075,7 +2075,7 @@
           <p:cNvPr id="9" name="スライド番号プレースホルダー 8">
             <a:extLst>
               <a:ext uri="{FF2B5EF4-FFF2-40B4-BE49-F238E27FC236}">
-                <a16:creationId xmlns:a16="http://schemas.microsoft.com/office/drawing/2014/main" id="{505AF7CC-5407-C793-C368-FC7F28F02E2C}"/>
+                <a16:creationId xmlns:a16="http://schemas.microsoft.com/office/drawing/2014/main" id="{4E121683-CA14-46F4-B63D-115C553A0AC1}"/>
               </a:ext>
             </a:extLst>
           </p:cNvPr>
@@ -2091,7 +2091,7 @@
           <a:bodyPr/>
           <a:lstStyle/>
           <a:p>
-            <a:fld id="{08944CC7-50C9-4B3B-9FE1-C07F1676EBBF}" type="slidenum">
+            <a:fld id="{043EC55A-0D47-41B3-AD36-51B34E2480AE}" type="slidenum">
               <a:rPr kumimoji="1" lang="ja-JP" altLang="en-US" smtClean="0"/>
               <a:t>‹#›</a:t>
             </a:fld>
@@ -2102,7 +2102,7 @@
     </p:spTree>
     <p:extLst>
       <p:ext uri="{BB962C8B-B14F-4D97-AF65-F5344CB8AC3E}">
-        <p14:creationId xmlns:p14="http://schemas.microsoft.com/office/powerpoint/2010/main" val="3503076361"/>
+        <p14:creationId xmlns:p14="http://schemas.microsoft.com/office/powerpoint/2010/main" val="3939111475"/>
       </p:ext>
     </p:extLst>
   </p:cSld>
@@ -2134,7 +2134,7 @@
           <p:cNvPr id="2" name="タイトル 1">
             <a:extLst>
               <a:ext uri="{FF2B5EF4-FFF2-40B4-BE49-F238E27FC236}">
-                <a16:creationId xmlns:a16="http://schemas.microsoft.com/office/drawing/2014/main" id="{69D368E1-44C0-845F-BD44-3FB46BCD2F3F}"/>
+                <a16:creationId xmlns:a16="http://schemas.microsoft.com/office/drawing/2014/main" id="{837F08B7-A57E-58C1-2EE1-EF5F8E1B54F5}"/>
               </a:ext>
             </a:extLst>
           </p:cNvPr>
@@ -2162,7 +2162,7 @@
           <p:cNvPr id="3" name="日付プレースホルダー 2">
             <a:extLst>
               <a:ext uri="{FF2B5EF4-FFF2-40B4-BE49-F238E27FC236}">
-                <a16:creationId xmlns:a16="http://schemas.microsoft.com/office/drawing/2014/main" id="{64FEA6DF-2259-CD8F-015F-B1CED34415C0}"/>
+                <a16:creationId xmlns:a16="http://schemas.microsoft.com/office/drawing/2014/main" id="{D8CEFDC5-6DC1-1EDF-5F26-CC239A951125}"/>
               </a:ext>
             </a:extLst>
           </p:cNvPr>
@@ -2178,7 +2178,7 @@
           <a:bodyPr/>
           <a:lstStyle/>
           <a:p>
-            <a:fld id="{50938B6C-5D5A-46E3-8523-470594EB007B}" type="datetimeFigureOut">
+            <a:fld id="{69EFDE8D-40B8-48E0-BD24-41E6F9DECD80}" type="datetimeFigureOut">
               <a:rPr kumimoji="1" lang="ja-JP" altLang="en-US" smtClean="0"/>
               <a:t>2026/7/30</a:t>
             </a:fld>
@@ -2191,7 +2191,7 @@
           <p:cNvPr id="4" name="フッター プレースホルダー 3">
             <a:extLst>
               <a:ext uri="{FF2B5EF4-FFF2-40B4-BE49-F238E27FC236}">
-                <a16:creationId xmlns:a16="http://schemas.microsoft.com/office/drawing/2014/main" id="{2FBA3D45-2BD9-31FA-5964-A9533FE79C38}"/>
+                <a16:creationId xmlns:a16="http://schemas.microsoft.com/office/drawing/2014/main" id="{97F7DF55-0BD9-877A-8D3A-67D0AECCCF89}"/>
               </a:ext>
             </a:extLst>
           </p:cNvPr>
@@ -2216,7 +2216,7 @@
           <p:cNvPr id="5" name="スライド番号プレースホルダー 4">
             <a:extLst>
               <a:ext uri="{FF2B5EF4-FFF2-40B4-BE49-F238E27FC236}">
-                <a16:creationId xmlns:a16="http://schemas.microsoft.com/office/drawing/2014/main" id="{24CA5B05-E288-DBE4-E449-83BA1F47BBD0}"/>
+                <a16:creationId xmlns:a16="http://schemas.microsoft.com/office/drawing/2014/main" id="{EF0790C3-401A-1AB1-58CD-4B6F42404C69}"/>
               </a:ext>
             </a:extLst>
           </p:cNvPr>
@@ -2232,7 +2232,7 @@
           <a:bodyPr/>
           <a:lstStyle/>
           <a:p>
-            <a:fld id="{08944CC7-50C9-4B3B-9FE1-C07F1676EBBF}" type="slidenum">
+            <a:fld id="{043EC55A-0D47-41B3-AD36-51B34E2480AE}" type="slidenum">
               <a:rPr kumimoji="1" lang="ja-JP" altLang="en-US" smtClean="0"/>
               <a:t>‹#›</a:t>
             </a:fld>
@@ -2243,7 +2243,7 @@
     </p:spTree>
     <p:extLst>
       <p:ext uri="{BB962C8B-B14F-4D97-AF65-F5344CB8AC3E}">
-        <p14:creationId xmlns:p14="http://schemas.microsoft.com/office/powerpoint/2010/main" val="4106647409"/>
+        <p14:creationId xmlns:p14="http://schemas.microsoft.com/office/powerpoint/2010/main" val="2514666339"/>
       </p:ext>
     </p:extLst>
   </p:cSld>
@@ -2275,7 +2275,7 @@
           <p:cNvPr id="2" name="日付プレースホルダー 1">
             <a:extLst>
               <a:ext uri="{FF2B5EF4-FFF2-40B4-BE49-F238E27FC236}">
-                <a16:creationId xmlns:a16="http://schemas.microsoft.com/office/drawing/2014/main" id="{55E3CCC1-5A86-A9D3-2C2A-A9EDB8EA2188}"/>
+                <a16:creationId xmlns:a16="http://schemas.microsoft.com/office/drawing/2014/main" id="{3D5AFEB0-02B7-057D-9B07-5ECB379B7EFC}"/>
               </a:ext>
             </a:extLst>
           </p:cNvPr>
@@ -2291,7 +2291,7 @@
           <a:bodyPr/>
           <a:lstStyle/>
           <a:p>
-            <a:fld id="{50938B6C-5D5A-46E3-8523-470594EB007B}" type="datetimeFigureOut">
+            <a:fld id="{69EFDE8D-40B8-48E0-BD24-41E6F9DECD80}" type="datetimeFigureOut">
               <a:rPr kumimoji="1" lang="ja-JP" altLang="en-US" smtClean="0"/>
               <a:t>2026/7/30</a:t>
             </a:fld>
@@ -2304,7 +2304,7 @@
           <p:cNvPr id="3" name="フッター プレースホルダー 2">
             <a:extLst>
               <a:ext uri="{FF2B5EF4-FFF2-40B4-BE49-F238E27FC236}">
-                <a16:creationId xmlns:a16="http://schemas.microsoft.com/office/drawing/2014/main" id="{D1EE08C5-7F78-CE2B-2797-47A66E93CAAB}"/>
+                <a16:creationId xmlns:a16="http://schemas.microsoft.com/office/drawing/2014/main" id="{2D43FBE4-A1A9-BA7A-FF64-72DB8A38CC6B}"/>
               </a:ext>
             </a:extLst>
           </p:cNvPr>
@@ -2329,7 +2329,7 @@
           <p:cNvPr id="4" name="スライド番号プレースホルダー 3">
             <a:extLst>
               <a:ext uri="{FF2B5EF4-FFF2-40B4-BE49-F238E27FC236}">
-                <a16:creationId xmlns:a16="http://schemas.microsoft.com/office/drawing/2014/main" id="{081D44A7-6B60-4A48-A79C-14A7C69C0A6D}"/>
+                <a16:creationId xmlns:a16="http://schemas.microsoft.com/office/drawing/2014/main" id="{10910FF8-14D2-ABD2-EEF1-96AF43D6FC4D}"/>
               </a:ext>
             </a:extLst>
           </p:cNvPr>
@@ -2345,7 +2345,7 @@
           <a:bodyPr/>
           <a:lstStyle/>
           <a:p>
-            <a:fld id="{08944CC7-50C9-4B3B-9FE1-C07F1676EBBF}" type="slidenum">
+            <a:fld id="{043EC55A-0D47-41B3-AD36-51B34E2480AE}" type="slidenum">
               <a:rPr kumimoji="1" lang="ja-JP" altLang="en-US" smtClean="0"/>
               <a:t>‹#›</a:t>
             </a:fld>
@@ -2356,7 +2356,7 @@
     </p:spTree>
     <p:extLst>
       <p:ext uri="{BB962C8B-B14F-4D97-AF65-F5344CB8AC3E}">
-        <p14:creationId xmlns:p14="http://schemas.microsoft.com/office/powerpoint/2010/main" val="1218458707"/>
+        <p14:creationId xmlns:p14="http://schemas.microsoft.com/office/powerpoint/2010/main" val="1665437044"/>
       </p:ext>
     </p:extLst>
   </p:cSld>
@@ -2388,7 +2388,7 @@
           <p:cNvPr id="2" name="タイトル 1">
             <a:extLst>
               <a:ext uri="{FF2B5EF4-FFF2-40B4-BE49-F238E27FC236}">
-                <a16:creationId xmlns:a16="http://schemas.microsoft.com/office/drawing/2014/main" id="{63785EC5-3A86-7714-004D-E34FB7BC4C66}"/>
+                <a16:creationId xmlns:a16="http://schemas.microsoft.com/office/drawing/2014/main" id="{D546AE76-1E04-AC9D-6459-E367F7F992B4}"/>
               </a:ext>
             </a:extLst>
           </p:cNvPr>
@@ -2425,7 +2425,7 @@
           <p:cNvPr id="3" name="コンテンツ プレースホルダー 2">
             <a:extLst>
               <a:ext uri="{FF2B5EF4-FFF2-40B4-BE49-F238E27FC236}">
-                <a16:creationId xmlns:a16="http://schemas.microsoft.com/office/drawing/2014/main" id="{B98D50C0-25E3-73D3-C6CC-5BE141B84B02}"/>
+                <a16:creationId xmlns:a16="http://schemas.microsoft.com/office/drawing/2014/main" id="{26944D13-FE2B-3E2D-E79D-50A94C606607}"/>
               </a:ext>
             </a:extLst>
           </p:cNvPr>
@@ -2547,7 +2547,7 @@
           <p:cNvPr id="4" name="テキスト プレースホルダー 3">
             <a:extLst>
               <a:ext uri="{FF2B5EF4-FFF2-40B4-BE49-F238E27FC236}">
-                <a16:creationId xmlns:a16="http://schemas.microsoft.com/office/drawing/2014/main" id="{38015AF9-ECEF-DA88-AC5B-4E992D0F55AC}"/>
+                <a16:creationId xmlns:a16="http://schemas.microsoft.com/office/drawing/2014/main" id="{BD4F168E-2D5B-01EF-6139-EC2758E13BFE}"/>
               </a:ext>
             </a:extLst>
           </p:cNvPr>
@@ -2618,7 +2618,7 @@
           <p:cNvPr id="5" name="日付プレースホルダー 4">
             <a:extLst>
               <a:ext uri="{FF2B5EF4-FFF2-40B4-BE49-F238E27FC236}">
-                <a16:creationId xmlns:a16="http://schemas.microsoft.com/office/drawing/2014/main" id="{C4C6DBCA-7B34-3307-FF06-045BB5ABAFFE}"/>
+                <a16:creationId xmlns:a16="http://schemas.microsoft.com/office/drawing/2014/main" id="{9E1E94BF-2207-3EF2-BA7B-B3288139BE95}"/>
               </a:ext>
             </a:extLst>
           </p:cNvPr>
@@ -2634,7 +2634,7 @@
           <a:bodyPr/>
           <a:lstStyle/>
           <a:p>
-            <a:fld id="{50938B6C-5D5A-46E3-8523-470594EB007B}" type="datetimeFigureOut">
+            <a:fld id="{69EFDE8D-40B8-48E0-BD24-41E6F9DECD80}" type="datetimeFigureOut">
               <a:rPr kumimoji="1" lang="ja-JP" altLang="en-US" smtClean="0"/>
               <a:t>2026/7/30</a:t>
             </a:fld>
@@ -2647,7 +2647,7 @@
           <p:cNvPr id="6" name="フッター プレースホルダー 5">
             <a:extLst>
               <a:ext uri="{FF2B5EF4-FFF2-40B4-BE49-F238E27FC236}">
-                <a16:creationId xmlns:a16="http://schemas.microsoft.com/office/drawing/2014/main" id="{EB549C95-8999-4EEC-26F1-2294913F01F2}"/>
+                <a16:creationId xmlns:a16="http://schemas.microsoft.com/office/drawing/2014/main" id="{991409AD-CFD2-86A8-DDAA-A2CC424E5A9C}"/>
               </a:ext>
             </a:extLst>
           </p:cNvPr>
@@ -2672,7 +2672,7 @@
           <p:cNvPr id="7" name="スライド番号プレースホルダー 6">
             <a:extLst>
               <a:ext uri="{FF2B5EF4-FFF2-40B4-BE49-F238E27FC236}">
-                <a16:creationId xmlns:a16="http://schemas.microsoft.com/office/drawing/2014/main" id="{0FD4E875-811C-73CE-3B6A-60D082F7FC2E}"/>
+                <a16:creationId xmlns:a16="http://schemas.microsoft.com/office/drawing/2014/main" id="{3B13A70C-B462-3630-15AE-3F730636A77F}"/>
               </a:ext>
             </a:extLst>
           </p:cNvPr>
@@ -2688,7 +2688,7 @@
           <a:bodyPr/>
           <a:lstStyle/>
           <a:p>
-            <a:fld id="{08944CC7-50C9-4B3B-9FE1-C07F1676EBBF}" type="slidenum">
+            <a:fld id="{043EC55A-0D47-41B3-AD36-51B34E2480AE}" type="slidenum">
               <a:rPr kumimoji="1" lang="ja-JP" altLang="en-US" smtClean="0"/>
               <a:t>‹#›</a:t>
             </a:fld>
@@ -2699,7 +2699,7 @@
     </p:spTree>
     <p:extLst>
       <p:ext uri="{BB962C8B-B14F-4D97-AF65-F5344CB8AC3E}">
-        <p14:creationId xmlns:p14="http://schemas.microsoft.com/office/powerpoint/2010/main" val="1092703109"/>
+        <p14:creationId xmlns:p14="http://schemas.microsoft.com/office/powerpoint/2010/main" val="2461531379"/>
       </p:ext>
     </p:extLst>
   </p:cSld>
@@ -2731,7 +2731,7 @@
           <p:cNvPr id="2" name="タイトル 1">
             <a:extLst>
               <a:ext uri="{FF2B5EF4-FFF2-40B4-BE49-F238E27FC236}">
-                <a16:creationId xmlns:a16="http://schemas.microsoft.com/office/drawing/2014/main" id="{1AAAC771-1442-F8F4-325A-0789E8F91104}"/>
+                <a16:creationId xmlns:a16="http://schemas.microsoft.com/office/drawing/2014/main" id="{6BBE9E1C-21EA-CC73-98EC-B3851AE16E37}"/>
               </a:ext>
             </a:extLst>
           </p:cNvPr>
@@ -2768,7 +2768,7 @@
           <p:cNvPr id="3" name="図プレースホルダー 2">
             <a:extLst>
               <a:ext uri="{FF2B5EF4-FFF2-40B4-BE49-F238E27FC236}">
-                <a16:creationId xmlns:a16="http://schemas.microsoft.com/office/drawing/2014/main" id="{43DA1FDF-3C4E-1563-1390-BC0B1371A7C6}"/>
+                <a16:creationId xmlns:a16="http://schemas.microsoft.com/office/drawing/2014/main" id="{03E6956F-F891-40FB-D468-A308D2A1F1FA}"/>
               </a:ext>
             </a:extLst>
           </p:cNvPr>
@@ -2835,7 +2835,7 @@
           <p:cNvPr id="4" name="テキスト プレースホルダー 3">
             <a:extLst>
               <a:ext uri="{FF2B5EF4-FFF2-40B4-BE49-F238E27FC236}">
-                <a16:creationId xmlns:a16="http://schemas.microsoft.com/office/drawing/2014/main" id="{5D5133C9-A336-DA77-2FF8-7975D556C34B}"/>
+                <a16:creationId xmlns:a16="http://schemas.microsoft.com/office/drawing/2014/main" id="{3A33648B-CDA4-6132-E6F4-4950E12523CC}"/>
               </a:ext>
             </a:extLst>
           </p:cNvPr>
@@ -2906,7 +2906,7 @@
           <p:cNvPr id="5" name="日付プレースホルダー 4">
             <a:extLst>
               <a:ext uri="{FF2B5EF4-FFF2-40B4-BE49-F238E27FC236}">
-                <a16:creationId xmlns:a16="http://schemas.microsoft.com/office/drawing/2014/main" id="{4AB885AF-D992-851E-C334-97DA5BA2B0E6}"/>
+                <a16:creationId xmlns:a16="http://schemas.microsoft.com/office/drawing/2014/main" id="{40941EA3-5D93-5C1D-2485-F39DC9DFA7D9}"/>
               </a:ext>
             </a:extLst>
           </p:cNvPr>
@@ -2922,7 +2922,7 @@
           <a:bodyPr/>
           <a:lstStyle/>
           <a:p>
-            <a:fld id="{50938B6C-5D5A-46E3-8523-470594EB007B}" type="datetimeFigureOut">
+            <a:fld id="{69EFDE8D-40B8-48E0-BD24-41E6F9DECD80}" type="datetimeFigureOut">
               <a:rPr kumimoji="1" lang="ja-JP" altLang="en-US" smtClean="0"/>
               <a:t>2026/7/30</a:t>
             </a:fld>
@@ -2935,7 +2935,7 @@
           <p:cNvPr id="6" name="フッター プレースホルダー 5">
             <a:extLst>
               <a:ext uri="{FF2B5EF4-FFF2-40B4-BE49-F238E27FC236}">
-                <a16:creationId xmlns:a16="http://schemas.microsoft.com/office/drawing/2014/main" id="{0710BED0-978C-91F4-CE00-E7A1AE0521FC}"/>
+                <a16:creationId xmlns:a16="http://schemas.microsoft.com/office/drawing/2014/main" id="{423DF9F3-2A99-031C-9B79-5723FE130FC7}"/>
               </a:ext>
             </a:extLst>
           </p:cNvPr>
@@ -2960,7 +2960,7 @@
           <p:cNvPr id="7" name="スライド番号プレースホルダー 6">
             <a:extLst>
               <a:ext uri="{FF2B5EF4-FFF2-40B4-BE49-F238E27FC236}">
-                <a16:creationId xmlns:a16="http://schemas.microsoft.com/office/drawing/2014/main" id="{17A6B9C3-7D0D-D01E-5C88-04213BF5B77C}"/>
+                <a16:creationId xmlns:a16="http://schemas.microsoft.com/office/drawing/2014/main" id="{775858E7-446E-694F-B13F-430DFB6B9BF8}"/>
               </a:ext>
             </a:extLst>
           </p:cNvPr>
@@ -2976,7 +2976,7 @@
           <a:bodyPr/>
           <a:lstStyle/>
           <a:p>
-            <a:fld id="{08944CC7-50C9-4B3B-9FE1-C07F1676EBBF}" type="slidenum">
+            <a:fld id="{043EC55A-0D47-41B3-AD36-51B34E2480AE}" type="slidenum">
               <a:rPr kumimoji="1" lang="ja-JP" altLang="en-US" smtClean="0"/>
               <a:t>‹#›</a:t>
             </a:fld>
@@ -2987,7 +2987,7 @@
     </p:spTree>
     <p:extLst>
       <p:ext uri="{BB962C8B-B14F-4D97-AF65-F5344CB8AC3E}">
-        <p14:creationId xmlns:p14="http://schemas.microsoft.com/office/powerpoint/2010/main" val="743486081"/>
+        <p14:creationId xmlns:p14="http://schemas.microsoft.com/office/powerpoint/2010/main" val="3136571589"/>
       </p:ext>
     </p:extLst>
   </p:cSld>
@@ -3024,7 +3024,7 @@
           <p:cNvPr id="2" name="タイトル プレースホルダー 1">
             <a:extLst>
               <a:ext uri="{FF2B5EF4-FFF2-40B4-BE49-F238E27FC236}">
-                <a16:creationId xmlns:a16="http://schemas.microsoft.com/office/drawing/2014/main" id="{A39ADBE5-04A2-94AC-C370-D9417309079B}"/>
+                <a16:creationId xmlns:a16="http://schemas.microsoft.com/office/drawing/2014/main" id="{4C7C4197-B79D-3E60-F0D1-DEF6DB0F85C5}"/>
               </a:ext>
             </a:extLst>
           </p:cNvPr>
@@ -3062,7 +3062,7 @@
           <p:cNvPr id="3" name="テキスト プレースホルダー 2">
             <a:extLst>
               <a:ext uri="{FF2B5EF4-FFF2-40B4-BE49-F238E27FC236}">
-                <a16:creationId xmlns:a16="http://schemas.microsoft.com/office/drawing/2014/main" id="{CDE36285-F920-AA40-B65E-9048254AA909}"/>
+                <a16:creationId xmlns:a16="http://schemas.microsoft.com/office/drawing/2014/main" id="{14066086-DCE4-805C-F8D9-F16622AF6E47}"/>
               </a:ext>
             </a:extLst>
           </p:cNvPr>
@@ -3161,7 +3161,7 @@
           <p:cNvPr id="4" name="日付プレースホルダー 3">
             <a:extLst>
               <a:ext uri="{FF2B5EF4-FFF2-40B4-BE49-F238E27FC236}">
-                <a16:creationId xmlns:a16="http://schemas.microsoft.com/office/drawing/2014/main" id="{67ECB23C-24AD-AC19-1448-E6B332786A68}"/>
+                <a16:creationId xmlns:a16="http://schemas.microsoft.com/office/drawing/2014/main" id="{6D75C0CC-ECC3-802B-FCAB-E1D8539DA3C2}"/>
               </a:ext>
             </a:extLst>
           </p:cNvPr>
@@ -3195,7 +3195,7 @@
             </a:lvl1pPr>
           </a:lstStyle>
           <a:p>
-            <a:fld id="{50938B6C-5D5A-46E3-8523-470594EB007B}" type="datetimeFigureOut">
+            <a:fld id="{69EFDE8D-40B8-48E0-BD24-41E6F9DECD80}" type="datetimeFigureOut">
               <a:rPr kumimoji="1" lang="ja-JP" altLang="en-US" smtClean="0"/>
               <a:t>2026/7/30</a:t>
             </a:fld>
@@ -3208,7 +3208,7 @@
           <p:cNvPr id="5" name="フッター プレースホルダー 4">
             <a:extLst>
               <a:ext uri="{FF2B5EF4-FFF2-40B4-BE49-F238E27FC236}">
-                <a16:creationId xmlns:a16="http://schemas.microsoft.com/office/drawing/2014/main" id="{812AD862-92A6-A82F-00BA-F25EB0AA226E}"/>
+                <a16:creationId xmlns:a16="http://schemas.microsoft.com/office/drawing/2014/main" id="{D23F1C42-22C2-7E00-1687-24093830C842}"/>
               </a:ext>
             </a:extLst>
           </p:cNvPr>
@@ -3251,7 +3251,7 @@
           <p:cNvPr id="6" name="スライド番号プレースホルダー 5">
             <a:extLst>
               <a:ext uri="{FF2B5EF4-FFF2-40B4-BE49-F238E27FC236}">
-                <a16:creationId xmlns:a16="http://schemas.microsoft.com/office/drawing/2014/main" id="{07B64B1C-9F99-0D09-2270-E642DD8DDB70}"/>
+                <a16:creationId xmlns:a16="http://schemas.microsoft.com/office/drawing/2014/main" id="{BC68A4C2-E368-2BC2-2098-D5C1276E7CD1}"/>
               </a:ext>
             </a:extLst>
           </p:cNvPr>
@@ -3285,7 +3285,7 @@
             </a:lvl1pPr>
           </a:lstStyle>
           <a:p>
-            <a:fld id="{08944CC7-50C9-4B3B-9FE1-C07F1676EBBF}" type="slidenum">
+            <a:fld id="{043EC55A-0D47-41B3-AD36-51B34E2480AE}" type="slidenum">
               <a:rPr kumimoji="1" lang="ja-JP" altLang="en-US" smtClean="0"/>
               <a:t>‹#›</a:t>
             </a:fld>
@@ -3296,7 +3296,7 @@
     </p:spTree>
     <p:extLst>
       <p:ext uri="{BB962C8B-B14F-4D97-AF65-F5344CB8AC3E}">
-        <p14:creationId xmlns:p14="http://schemas.microsoft.com/office/powerpoint/2010/main" val="1697122103"/>
+        <p14:creationId xmlns:p14="http://schemas.microsoft.com/office/powerpoint/2010/main" val="301332640"/>
       </p:ext>
     </p:extLst>
   </p:cSld>
@@ -3619,7 +3619,7 @@
           <p:cNvPr id="2" name="テキスト ボックス 1">
             <a:extLst>
               <a:ext uri="{FF2B5EF4-FFF2-40B4-BE49-F238E27FC236}">
-                <a16:creationId xmlns:a16="http://schemas.microsoft.com/office/drawing/2014/main" id="{AA750EF8-2B5D-6092-6C6A-79565D0F24C0}"/>
+                <a16:creationId xmlns:a16="http://schemas.microsoft.com/office/drawing/2014/main" id="{EB6234FD-6249-D8BC-308D-27442A6098AA}"/>
               </a:ext>
             </a:extLst>
           </p:cNvPr>
@@ -3665,7 +3665,7 @@
           <p:cNvPr id="3" name="テキスト ボックス 2">
             <a:extLst>
               <a:ext uri="{FF2B5EF4-FFF2-40B4-BE49-F238E27FC236}">
-                <a16:creationId xmlns:a16="http://schemas.microsoft.com/office/drawing/2014/main" id="{9D0C00F3-EBE7-9099-EE4E-EC7393A841DF}"/>
+                <a16:creationId xmlns:a16="http://schemas.microsoft.com/office/drawing/2014/main" id="{DAA4768B-AF14-022B-D90A-39420E1B348C}"/>
               </a:ext>
             </a:extLst>
           </p:cNvPr>
@@ -3695,14 +3695,17 @@
                 </a:solidFill>
                 <a:latin typeface="Arial" panose="020B0604020202020204" pitchFamily="34" charset="0"/>
               </a:rPr>
-              <a:t>asia-trip-concierge TECH EXPLANATION</a:t>
-            </a:r>
-            <a:endParaRPr kumimoji="1" lang="ja-JP" altLang="en-US" sz="3400" b="1">
-              <a:solidFill>
-                <a:srgbClr val="111111"/>
-              </a:solidFill>
-              <a:latin typeface="Arial" panose="020B0604020202020204" pitchFamily="34" charset="0"/>
-            </a:endParaRPr>
+              <a:t>Asia Trip Concierge</a:t>
+            </a:r>
+            <a:r>
+              <a:rPr kumimoji="1" lang="ja-JP" altLang="en-US" sz="3400" b="1">
+                <a:solidFill>
+                  <a:srgbClr val="111111"/>
+                </a:solidFill>
+                <a:latin typeface="Arial" panose="020B0604020202020204" pitchFamily="34" charset="0"/>
+              </a:rPr>
+              <a:t>の技術解説</a:t>
+            </a:r>
           </a:p>
         </p:txBody>
       </p:sp>
@@ -3711,7 +3714,7 @@
           <p:cNvPr id="4" name="テキスト ボックス 3">
             <a:extLst>
               <a:ext uri="{FF2B5EF4-FFF2-40B4-BE49-F238E27FC236}">
-                <a16:creationId xmlns:a16="http://schemas.microsoft.com/office/drawing/2014/main" id="{24402EC8-B257-A5C5-3C85-C887FA7826FA}"/>
+                <a16:creationId xmlns:a16="http://schemas.microsoft.com/office/drawing/2014/main" id="{42CE3EDD-6CEB-DF05-D79F-36DAA130D12B}"/>
               </a:ext>
             </a:extLst>
           </p:cNvPr>
@@ -3735,20 +3738,14 @@
           <a:lstStyle/>
           <a:p>
             <a:r>
-              <a:rPr kumimoji="1" lang="en-US" altLang="ja-JP" sz="2000">
+              <a:rPr kumimoji="1" lang="ja-JP" altLang="en-US" sz="2000">
                 <a:solidFill>
                   <a:srgbClr val="333333"/>
                 </a:solidFill>
                 <a:latin typeface="Arial" panose="020B0604020202020204" pitchFamily="34" charset="0"/>
               </a:rPr>
-              <a:t>Architecture, implementation and commit history in 75 seconds</a:t>
-            </a:r>
-            <a:endParaRPr kumimoji="1" lang="ja-JP" altLang="en-US" sz="2000">
-              <a:solidFill>
-                <a:srgbClr val="333333"/>
-              </a:solidFill>
-              <a:latin typeface="Arial" panose="020B0604020202020204" pitchFamily="34" charset="0"/>
-            </a:endParaRPr>
+              <a:t>設計・実装・コミットから学ぶ短時間プレビュー</a:t>
+            </a:r>
           </a:p>
         </p:txBody>
       </p:sp>
@@ -3757,7 +3754,7 @@
           <p:cNvPr id="5" name="テキスト ボックス 4">
             <a:extLst>
               <a:ext uri="{FF2B5EF4-FFF2-40B4-BE49-F238E27FC236}">
-                <a16:creationId xmlns:a16="http://schemas.microsoft.com/office/drawing/2014/main" id="{9F89E31C-303B-6942-B004-AE33DFF57F95}"/>
+                <a16:creationId xmlns:a16="http://schemas.microsoft.com/office/drawing/2014/main" id="{A5A5F727-D185-21D6-A67D-397D82BA891B}"/>
               </a:ext>
             </a:extLst>
           </p:cNvPr>
@@ -3804,7 +3801,7 @@
             <a:hlinkClick r:id="" action="ppaction://media"/>
             <a:extLst>
               <a:ext uri="{FF2B5EF4-FFF2-40B4-BE49-F238E27FC236}">
-                <a16:creationId xmlns:a16="http://schemas.microsoft.com/office/drawing/2014/main" id="{FA1EC542-D7DE-0431-4A30-46A452ACCBFE}"/>
+                <a16:creationId xmlns:a16="http://schemas.microsoft.com/office/drawing/2014/main" id="{41E1E80B-8875-89E3-5EC7-D3EAAB0DD6A4}"/>
               </a:ext>
             </a:extLst>
           </p:cNvPr>
@@ -3839,7 +3836,7 @@
     </p:spTree>
     <p:extLst>
       <p:ext uri="{BB962C8B-B14F-4D97-AF65-F5344CB8AC3E}">
-        <p14:creationId xmlns:p14="http://schemas.microsoft.com/office/powerpoint/2010/main" val="3371625522"/>
+        <p14:creationId xmlns:p14="http://schemas.microsoft.com/office/powerpoint/2010/main" val="740873246"/>
       </p:ext>
     </p:extLst>
   </p:cSld>
@@ -3963,7 +3960,7 @@
           <p:cNvPr id="2" name="テキスト ボックス 1">
             <a:extLst>
               <a:ext uri="{FF2B5EF4-FFF2-40B4-BE49-F238E27FC236}">
-                <a16:creationId xmlns:a16="http://schemas.microsoft.com/office/drawing/2014/main" id="{B4F644CF-4F54-9862-56F5-840E30E00B62}"/>
+                <a16:creationId xmlns:a16="http://schemas.microsoft.com/office/drawing/2014/main" id="{9A36DAAE-C548-F04B-E921-B62307215D90}"/>
               </a:ext>
             </a:extLst>
           </p:cNvPr>
@@ -4009,7 +4006,7 @@
           <p:cNvPr id="3" name="テキスト ボックス 2">
             <a:extLst>
               <a:ext uri="{FF2B5EF4-FFF2-40B4-BE49-F238E27FC236}">
-                <a16:creationId xmlns:a16="http://schemas.microsoft.com/office/drawing/2014/main" id="{485AEAEB-9D89-01FF-195D-F7B268FEF482}"/>
+                <a16:creationId xmlns:a16="http://schemas.microsoft.com/office/drawing/2014/main" id="{CE586864-1462-6760-8F59-07668A61B15C}"/>
               </a:ext>
             </a:extLst>
           </p:cNvPr>
@@ -4033,20 +4030,14 @@
           <a:lstStyle/>
           <a:p>
             <a:r>
-              <a:rPr kumimoji="1" lang="en-US" altLang="ja-JP" sz="3400" b="1">
+              <a:rPr kumimoji="1" lang="ja-JP" altLang="en-US" sz="3400" b="1">
                 <a:solidFill>
                   <a:srgbClr val="111111"/>
                 </a:solidFill>
                 <a:latin typeface="Arial" panose="020B0604020202020204" pitchFamily="34" charset="0"/>
               </a:rPr>
-              <a:t>WHAT DOES IT SOLVE?</a:t>
-            </a:r>
-            <a:endParaRPr kumimoji="1" lang="ja-JP" altLang="en-US" sz="3400" b="1">
-              <a:solidFill>
-                <a:srgbClr val="111111"/>
-              </a:solidFill>
-              <a:latin typeface="Arial" panose="020B0604020202020204" pitchFamily="34" charset="0"/>
-            </a:endParaRPr>
+              <a:t>このプロジェクトは何を解決する？</a:t>
+            </a:r>
           </a:p>
         </p:txBody>
       </p:sp>
@@ -4055,7 +4046,7 @@
           <p:cNvPr id="4" name="テキスト ボックス 3">
             <a:extLst>
               <a:ext uri="{FF2B5EF4-FFF2-40B4-BE49-F238E27FC236}">
-                <a16:creationId xmlns:a16="http://schemas.microsoft.com/office/drawing/2014/main" id="{47F3733E-9108-7AA6-DF00-13E663520BE9}"/>
+                <a16:creationId xmlns:a16="http://schemas.microsoft.com/office/drawing/2014/main" id="{39C3F212-3A18-B49E-5DE6-D9C8D86E8644}"/>
               </a:ext>
             </a:extLst>
           </p:cNvPr>
@@ -4101,7 +4092,7 @@
           <p:cNvPr id="5" name="テキスト ボックス 4">
             <a:extLst>
               <a:ext uri="{FF2B5EF4-FFF2-40B4-BE49-F238E27FC236}">
-                <a16:creationId xmlns:a16="http://schemas.microsoft.com/office/drawing/2014/main" id="{5E6CE8E6-6E98-CE67-C190-4C53D67BFAE1}"/>
+                <a16:creationId xmlns:a16="http://schemas.microsoft.com/office/drawing/2014/main" id="{A50D5464-4FCC-363D-F84F-48FE8E088167}"/>
               </a:ext>
             </a:extLst>
           </p:cNvPr>
@@ -4148,7 +4139,7 @@
             <a:hlinkClick r:id="" action="ppaction://media"/>
             <a:extLst>
               <a:ext uri="{FF2B5EF4-FFF2-40B4-BE49-F238E27FC236}">
-                <a16:creationId xmlns:a16="http://schemas.microsoft.com/office/drawing/2014/main" id="{37D23E07-2B2B-D19F-7EE8-89BEF5A255EF}"/>
+                <a16:creationId xmlns:a16="http://schemas.microsoft.com/office/drawing/2014/main" id="{BB81ECF5-DB27-1EF3-C454-86E65B797FF9}"/>
               </a:ext>
             </a:extLst>
           </p:cNvPr>
@@ -4183,7 +4174,7 @@
     </p:spTree>
     <p:extLst>
       <p:ext uri="{BB962C8B-B14F-4D97-AF65-F5344CB8AC3E}">
-        <p14:creationId xmlns:p14="http://schemas.microsoft.com/office/powerpoint/2010/main" val="3137668410"/>
+        <p14:creationId xmlns:p14="http://schemas.microsoft.com/office/powerpoint/2010/main" val="558408830"/>
       </p:ext>
     </p:extLst>
   </p:cSld>
@@ -4307,7 +4298,7 @@
           <p:cNvPr id="2" name="テキスト ボックス 1">
             <a:extLst>
               <a:ext uri="{FF2B5EF4-FFF2-40B4-BE49-F238E27FC236}">
-                <a16:creationId xmlns:a16="http://schemas.microsoft.com/office/drawing/2014/main" id="{54BCF7AF-4F8B-1DA8-0F8A-595BC62CA024}"/>
+                <a16:creationId xmlns:a16="http://schemas.microsoft.com/office/drawing/2014/main" id="{6FD92DE6-0FAD-A69B-7A88-0440252D1A84}"/>
               </a:ext>
             </a:extLst>
           </p:cNvPr>
@@ -4353,7 +4344,7 @@
           <p:cNvPr id="3" name="テキスト ボックス 2">
             <a:extLst>
               <a:ext uri="{FF2B5EF4-FFF2-40B4-BE49-F238E27FC236}">
-                <a16:creationId xmlns:a16="http://schemas.microsoft.com/office/drawing/2014/main" id="{FAA20EAE-311F-9E22-9152-01CD6BEE7B55}"/>
+                <a16:creationId xmlns:a16="http://schemas.microsoft.com/office/drawing/2014/main" id="{7B65812B-60F8-66EA-1004-F3E0B4D982CF}"/>
               </a:ext>
             </a:extLst>
           </p:cNvPr>
@@ -4377,20 +4368,14 @@
           <a:lstStyle/>
           <a:p>
             <a:r>
-              <a:rPr kumimoji="1" lang="en-US" altLang="ja-JP" sz="3400" b="1">
+              <a:rPr kumimoji="1" lang="ja-JP" altLang="en-US" sz="3400" b="1">
                 <a:solidFill>
                   <a:srgbClr val="111111"/>
                 </a:solidFill>
                 <a:latin typeface="Arial" panose="020B0604020202020204" pitchFamily="34" charset="0"/>
               </a:rPr>
-              <a:t>TECH STACK</a:t>
-            </a:r>
-            <a:endParaRPr kumimoji="1" lang="ja-JP" altLang="en-US" sz="3400" b="1">
-              <a:solidFill>
-                <a:srgbClr val="111111"/>
-              </a:solidFill>
-              <a:latin typeface="Arial" panose="020B0604020202020204" pitchFamily="34" charset="0"/>
-            </a:endParaRPr>
+              <a:t>技術スタック</a:t>
+            </a:r>
           </a:p>
         </p:txBody>
       </p:sp>
@@ -4399,7 +4384,7 @@
           <p:cNvPr id="4" name="テキスト ボックス 3">
             <a:extLst>
               <a:ext uri="{FF2B5EF4-FFF2-40B4-BE49-F238E27FC236}">
-                <a16:creationId xmlns:a16="http://schemas.microsoft.com/office/drawing/2014/main" id="{2BAD8B1D-0399-C98F-8E90-C46A03ADAD60}"/>
+                <a16:creationId xmlns:a16="http://schemas.microsoft.com/office/drawing/2014/main" id="{615C8093-2EF1-5CB6-FD17-532636FC89B4}"/>
               </a:ext>
             </a:extLst>
           </p:cNvPr>
@@ -4409,7 +4394,7 @@
         <p:spPr>
           <a:xfrm>
             <a:off x="533400" y="3429000"/>
-            <a:ext cx="10795000" cy="400110"/>
+            <a:ext cx="10795000" cy="707886"/>
           </a:xfrm>
           <a:prstGeom prst="rect">
             <a:avLst/>
@@ -4423,13 +4408,22 @@
           <a:lstStyle/>
           <a:p>
             <a:r>
+              <a:rPr kumimoji="1" lang="ja-JP" altLang="en-US" sz="2000">
+                <a:solidFill>
+                  <a:srgbClr val="333333"/>
+                </a:solidFill>
+                <a:latin typeface="Arial" panose="020B0604020202020204" pitchFamily="34" charset="0"/>
+              </a:rPr>
+              <a:t>主要技術：</a:t>
+            </a:r>
+            <a:r>
               <a:rPr kumimoji="1" lang="en-US" altLang="ja-JP" sz="2000">
                 <a:solidFill>
                   <a:srgbClr val="333333"/>
                 </a:solidFill>
                 <a:latin typeface="Arial" panose="020B0604020202020204" pitchFamily="34" charset="0"/>
               </a:rPr>
-              <a:t>Primary technologies: TypeScript</a:t>
+              <a:t>TypeScript</a:t>
             </a:r>
             <a:r>
               <a:rPr kumimoji="1" lang="ja-JP" altLang="en-US" sz="2000">
@@ -4447,14 +4441,18 @@
                 </a:solidFill>
                 <a:latin typeface="Arial" panose="020B0604020202020204" pitchFamily="34" charset="0"/>
               </a:rPr>
-              <a:t>JavaScript</a:t>
-            </a:r>
-            <a:endParaRPr kumimoji="1" lang="ja-JP" altLang="en-US" sz="2000">
-              <a:solidFill>
-                <a:srgbClr val="333333"/>
-              </a:solidFill>
-              <a:latin typeface="Arial" panose="020B0604020202020204" pitchFamily="34" charset="0"/>
-            </a:endParaRPr>
+              <a:t>JavaScript
+</a:t>
+            </a:r>
+            <a:r>
+              <a:rPr kumimoji="1" lang="ja-JP" altLang="en-US" sz="2000">
+                <a:solidFill>
+                  <a:srgbClr val="333333"/>
+                </a:solidFill>
+                <a:latin typeface="Arial" panose="020B0604020202020204" pitchFamily="34" charset="0"/>
+              </a:rPr>
+              <a:t>役割を分け、保守しやすい構成を目指しています。</a:t>
+            </a:r>
           </a:p>
         </p:txBody>
       </p:sp>
@@ -4463,7 +4461,7 @@
           <p:cNvPr id="5" name="テキスト ボックス 4">
             <a:extLst>
               <a:ext uri="{FF2B5EF4-FFF2-40B4-BE49-F238E27FC236}">
-                <a16:creationId xmlns:a16="http://schemas.microsoft.com/office/drawing/2014/main" id="{F9A52297-391E-7F27-D069-D327F112DB20}"/>
+                <a16:creationId xmlns:a16="http://schemas.microsoft.com/office/drawing/2014/main" id="{E9EE3878-F7DD-AE6C-523B-FF3B51313736}"/>
               </a:ext>
             </a:extLst>
           </p:cNvPr>
@@ -4510,7 +4508,7 @@
             <a:hlinkClick r:id="" action="ppaction://media"/>
             <a:extLst>
               <a:ext uri="{FF2B5EF4-FFF2-40B4-BE49-F238E27FC236}">
-                <a16:creationId xmlns:a16="http://schemas.microsoft.com/office/drawing/2014/main" id="{8F3C693C-9783-B966-6602-67E4DFEA2C4C}"/>
+                <a16:creationId xmlns:a16="http://schemas.microsoft.com/office/drawing/2014/main" id="{DA56C640-2BC6-1CBC-C8AB-7C66202D1636}"/>
               </a:ext>
             </a:extLst>
           </p:cNvPr>
@@ -4545,7 +4543,7 @@
     </p:spTree>
     <p:extLst>
       <p:ext uri="{BB962C8B-B14F-4D97-AF65-F5344CB8AC3E}">
-        <p14:creationId xmlns:p14="http://schemas.microsoft.com/office/powerpoint/2010/main" val="2558860595"/>
+        <p14:creationId xmlns:p14="http://schemas.microsoft.com/office/powerpoint/2010/main" val="2263878779"/>
       </p:ext>
     </p:extLst>
   </p:cSld>
@@ -4669,7 +4667,7 @@
           <p:cNvPr id="2" name="テキスト ボックス 1">
             <a:extLst>
               <a:ext uri="{FF2B5EF4-FFF2-40B4-BE49-F238E27FC236}">
-                <a16:creationId xmlns:a16="http://schemas.microsoft.com/office/drawing/2014/main" id="{D8E72534-2490-75C5-BB20-2312FAAC137D}"/>
+                <a16:creationId xmlns:a16="http://schemas.microsoft.com/office/drawing/2014/main" id="{588DC0F7-257D-C564-67DC-FF9A163CFD1D}"/>
               </a:ext>
             </a:extLst>
           </p:cNvPr>
@@ -4715,7 +4713,7 @@
           <p:cNvPr id="3" name="テキスト ボックス 2">
             <a:extLst>
               <a:ext uri="{FF2B5EF4-FFF2-40B4-BE49-F238E27FC236}">
-                <a16:creationId xmlns:a16="http://schemas.microsoft.com/office/drawing/2014/main" id="{7F7CBC11-25ED-BD17-6251-A7721BBEEF66}"/>
+                <a16:creationId xmlns:a16="http://schemas.microsoft.com/office/drawing/2014/main" id="{DBCB3EE6-A1DB-0E72-BBC6-44C2577F6E01}"/>
               </a:ext>
             </a:extLst>
           </p:cNvPr>
@@ -4739,20 +4737,14 @@
           <a:lstStyle/>
           <a:p>
             <a:r>
-              <a:rPr kumimoji="1" lang="en-US" altLang="ja-JP" sz="3400" b="1">
+              <a:rPr kumimoji="1" lang="ja-JP" altLang="en-US" sz="3400" b="1">
                 <a:solidFill>
                   <a:srgbClr val="111111"/>
                 </a:solidFill>
                 <a:latin typeface="Arial" panose="020B0604020202020204" pitchFamily="34" charset="0"/>
               </a:rPr>
-              <a:t>REPOSITORY HIGHLIGHTS</a:t>
-            </a:r>
-            <a:endParaRPr kumimoji="1" lang="ja-JP" altLang="en-US" sz="3400" b="1">
-              <a:solidFill>
-                <a:srgbClr val="111111"/>
-              </a:solidFill>
-              <a:latin typeface="Arial" panose="020B0604020202020204" pitchFamily="34" charset="0"/>
-            </a:endParaRPr>
+              <a:t>リポジトリの読みどころ</a:t>
+            </a:r>
           </a:p>
         </p:txBody>
       </p:sp>
@@ -4761,7 +4753,7 @@
           <p:cNvPr id="4" name="テキスト ボックス 3">
             <a:extLst>
               <a:ext uri="{FF2B5EF4-FFF2-40B4-BE49-F238E27FC236}">
-                <a16:creationId xmlns:a16="http://schemas.microsoft.com/office/drawing/2014/main" id="{BB7B6538-BB8B-38E3-EF98-55764B0CB5B4}"/>
+                <a16:creationId xmlns:a16="http://schemas.microsoft.com/office/drawing/2014/main" id="{D4E50D3C-12A0-A1F9-1310-7421E3D6269A}"/>
               </a:ext>
             </a:extLst>
           </p:cNvPr>
@@ -4771,7 +4763,7 @@
         <p:spPr>
           <a:xfrm>
             <a:off x="533400" y="3429000"/>
-            <a:ext cx="10795000" cy="400110"/>
+            <a:ext cx="10795000" cy="707886"/>
           </a:xfrm>
           <a:prstGeom prst="rect">
             <a:avLst/>
@@ -4785,13 +4777,77 @@
           <a:lstStyle/>
           <a:p>
             <a:r>
+              <a:rPr kumimoji="1" lang="ja-JP" altLang="en-US" sz="2000">
+                <a:solidFill>
+                  <a:srgbClr val="333333"/>
+                </a:solidFill>
+                <a:latin typeface="Arial" panose="020B0604020202020204" pitchFamily="34" charset="0"/>
+              </a:rPr>
+              <a:t>公開コード、</a:t>
+            </a:r>
+            <a:r>
               <a:rPr kumimoji="1" lang="en-US" altLang="ja-JP" sz="2000">
                 <a:solidFill>
                   <a:srgbClr val="333333"/>
                 </a:solidFill>
                 <a:latin typeface="Arial" panose="020B0604020202020204" pitchFamily="34" charset="0"/>
               </a:rPr>
-              <a:t>Public source code, README and commit history reveal the design decisions.</a:t>
+              <a:t>README</a:t>
+            </a:r>
+            <a:r>
+              <a:rPr kumimoji="1" lang="ja-JP" altLang="en-US" sz="2000">
+                <a:solidFill>
+                  <a:srgbClr val="333333"/>
+                </a:solidFill>
+                <a:latin typeface="Arial" panose="020B0604020202020204" pitchFamily="34" charset="0"/>
+              </a:rPr>
+              <a:t>、コミット履歴から設計判断を確認できます。
+主なファイル：</a:t>
+            </a:r>
+            <a:r>
+              <a:rPr kumimoji="1" lang="en-US" altLang="ja-JP" sz="2000">
+                <a:solidFill>
+                  <a:srgbClr val="333333"/>
+                </a:solidFill>
+                <a:latin typeface="Arial" panose="020B0604020202020204" pitchFamily="34" charset="0"/>
+              </a:rPr>
+              <a:t>README.md</a:t>
+            </a:r>
+            <a:r>
+              <a:rPr kumimoji="1" lang="ja-JP" altLang="en-US" sz="2000">
+                <a:solidFill>
+                  <a:srgbClr val="333333"/>
+                </a:solidFill>
+                <a:latin typeface="Arial" panose="020B0604020202020204" pitchFamily="34" charset="0"/>
+              </a:rPr>
+              <a:t>、</a:t>
+            </a:r>
+            <a:r>
+              <a:rPr kumimoji="1" lang="en-US" altLang="ja-JP" sz="2000">
+                <a:solidFill>
+                  <a:srgbClr val="333333"/>
+                </a:solidFill>
+                <a:latin typeface="Arial" panose="020B0604020202020204" pitchFamily="34" charset="0"/>
+              </a:rPr>
+              <a:t>app</a:t>
+            </a:r>
+            <a:r>
+              <a:rPr kumimoji="1" lang="ja-JP" altLang="en-US" sz="2000">
+                <a:solidFill>
+                  <a:srgbClr val="333333"/>
+                </a:solidFill>
+                <a:latin typeface="Arial" panose="020B0604020202020204" pitchFamily="34" charset="0"/>
+              </a:rPr>
+              <a:t>、</a:t>
+            </a:r>
+            <a:r>
+              <a:rPr kumimoji="1" lang="en-US" altLang="ja-JP" sz="2000">
+                <a:solidFill>
+                  <a:srgbClr val="333333"/>
+                </a:solidFill>
+                <a:latin typeface="Arial" panose="020B0604020202020204" pitchFamily="34" charset="0"/>
+              </a:rPr>
+              <a:t>build</a:t>
             </a:r>
             <a:endParaRPr kumimoji="1" lang="ja-JP" altLang="en-US" sz="2000">
               <a:solidFill>
@@ -4807,7 +4863,7 @@
           <p:cNvPr id="5" name="テキスト ボックス 4">
             <a:extLst>
               <a:ext uri="{FF2B5EF4-FFF2-40B4-BE49-F238E27FC236}">
-                <a16:creationId xmlns:a16="http://schemas.microsoft.com/office/drawing/2014/main" id="{4EC531CF-DF11-13E2-FB18-E06D3FE7F045}"/>
+                <a16:creationId xmlns:a16="http://schemas.microsoft.com/office/drawing/2014/main" id="{7E2391DE-B4FA-6F99-F6E7-9C0F8082B619}"/>
               </a:ext>
             </a:extLst>
           </p:cNvPr>
@@ -4854,7 +4910,7 @@
             <a:hlinkClick r:id="" action="ppaction://media"/>
             <a:extLst>
               <a:ext uri="{FF2B5EF4-FFF2-40B4-BE49-F238E27FC236}">
-                <a16:creationId xmlns:a16="http://schemas.microsoft.com/office/drawing/2014/main" id="{37000558-050E-325C-1E70-53D0C55C7BE7}"/>
+                <a16:creationId xmlns:a16="http://schemas.microsoft.com/office/drawing/2014/main" id="{311B754F-1526-6919-B375-9199A8CDE0AD}"/>
               </a:ext>
             </a:extLst>
           </p:cNvPr>
@@ -4889,7 +4945,7 @@
     </p:spTree>
     <p:extLst>
       <p:ext uri="{BB962C8B-B14F-4D97-AF65-F5344CB8AC3E}">
-        <p14:creationId xmlns:p14="http://schemas.microsoft.com/office/powerpoint/2010/main" val="514451699"/>
+        <p14:creationId xmlns:p14="http://schemas.microsoft.com/office/powerpoint/2010/main" val="2526142639"/>
       </p:ext>
     </p:extLst>
   </p:cSld>
@@ -5013,7 +5069,7 @@
           <p:cNvPr id="2" name="テキスト ボックス 1">
             <a:extLst>
               <a:ext uri="{FF2B5EF4-FFF2-40B4-BE49-F238E27FC236}">
-                <a16:creationId xmlns:a16="http://schemas.microsoft.com/office/drawing/2014/main" id="{BBAA3D2F-9837-739E-D831-9421A0666711}"/>
+                <a16:creationId xmlns:a16="http://schemas.microsoft.com/office/drawing/2014/main" id="{772399A2-E5D9-5437-F9AD-7F762743BCF0}"/>
               </a:ext>
             </a:extLst>
           </p:cNvPr>
@@ -5059,7 +5115,7 @@
           <p:cNvPr id="3" name="テキスト ボックス 2">
             <a:extLst>
               <a:ext uri="{FF2B5EF4-FFF2-40B4-BE49-F238E27FC236}">
-                <a16:creationId xmlns:a16="http://schemas.microsoft.com/office/drawing/2014/main" id="{6CBE6433-A926-092F-D2F4-D3B62481D85A}"/>
+                <a16:creationId xmlns:a16="http://schemas.microsoft.com/office/drawing/2014/main" id="{C3DAB66F-3E43-F4BE-7A9F-654FAD69A147}"/>
               </a:ext>
             </a:extLst>
           </p:cNvPr>
@@ -5083,20 +5139,14 @@
           <a:lstStyle/>
           <a:p>
             <a:r>
-              <a:rPr kumimoji="1" lang="en-US" altLang="ja-JP" sz="3400" b="1">
+              <a:rPr kumimoji="1" lang="ja-JP" altLang="en-US" sz="3400" b="1">
                 <a:solidFill>
                   <a:srgbClr val="111111"/>
                 </a:solidFill>
                 <a:latin typeface="Arial" panose="020B0604020202020204" pitchFamily="34" charset="0"/>
               </a:rPr>
-              <a:t>ITERATIVE IMPROVEMENT</a:t>
-            </a:r>
-            <a:endParaRPr kumimoji="1" lang="ja-JP" altLang="en-US" sz="3400" b="1">
-              <a:solidFill>
-                <a:srgbClr val="111111"/>
-              </a:solidFill>
-              <a:latin typeface="Arial" panose="020B0604020202020204" pitchFamily="34" charset="0"/>
-            </a:endParaRPr>
+              <a:t>コミットから分かる改善</a:t>
+            </a:r>
           </a:p>
         </p:txBody>
       </p:sp>
@@ -5105,7 +5155,7 @@
           <p:cNvPr id="4" name="テキスト ボックス 3">
             <a:extLst>
               <a:ext uri="{FF2B5EF4-FFF2-40B4-BE49-F238E27FC236}">
-                <a16:creationId xmlns:a16="http://schemas.microsoft.com/office/drawing/2014/main" id="{A951203A-C298-E5AF-E732-123745374F4C}"/>
+                <a16:creationId xmlns:a16="http://schemas.microsoft.com/office/drawing/2014/main" id="{4E96D545-2533-8D83-638F-914C1F9BFBA4}"/>
               </a:ext>
             </a:extLst>
           </p:cNvPr>
@@ -5135,7 +5185,7 @@
                 </a:solidFill>
                 <a:latin typeface="Arial" panose="020B0604020202020204" pitchFamily="34" charset="0"/>
               </a:rPr>
-              <a:t>Small commits continuously improve features, quality and release readiness.</a:t>
+              <a:t>Configure private site hosting</a:t>
             </a:r>
             <a:endParaRPr kumimoji="1" lang="ja-JP" altLang="en-US" sz="2000">
               <a:solidFill>
@@ -5151,7 +5201,7 @@
           <p:cNvPr id="5" name="テキスト ボックス 4">
             <a:extLst>
               <a:ext uri="{FF2B5EF4-FFF2-40B4-BE49-F238E27FC236}">
-                <a16:creationId xmlns:a16="http://schemas.microsoft.com/office/drawing/2014/main" id="{93FE2FF4-C0C9-C743-04BD-FDA8BFBC5B66}"/>
+                <a16:creationId xmlns:a16="http://schemas.microsoft.com/office/drawing/2014/main" id="{DB5666C7-3D5B-F30D-2184-BAD9264C7FC5}"/>
               </a:ext>
             </a:extLst>
           </p:cNvPr>
@@ -5198,7 +5248,7 @@
             <a:hlinkClick r:id="" action="ppaction://media"/>
             <a:extLst>
               <a:ext uri="{FF2B5EF4-FFF2-40B4-BE49-F238E27FC236}">
-                <a16:creationId xmlns:a16="http://schemas.microsoft.com/office/drawing/2014/main" id="{126020F9-7590-6378-BE99-DC04A436F72D}"/>
+                <a16:creationId xmlns:a16="http://schemas.microsoft.com/office/drawing/2014/main" id="{5DCF2842-CB10-AD23-0D3B-55449D21292D}"/>
               </a:ext>
             </a:extLst>
           </p:cNvPr>
@@ -5233,7 +5283,7 @@
     </p:spTree>
     <p:extLst>
       <p:ext uri="{BB962C8B-B14F-4D97-AF65-F5344CB8AC3E}">
-        <p14:creationId xmlns:p14="http://schemas.microsoft.com/office/powerpoint/2010/main" val="2102127918"/>
+        <p14:creationId xmlns:p14="http://schemas.microsoft.com/office/powerpoint/2010/main" val="1394218428"/>
       </p:ext>
     </p:extLst>
   </p:cSld>
@@ -5357,7 +5407,7 @@
           <p:cNvPr id="2" name="テキスト ボックス 1">
             <a:extLst>
               <a:ext uri="{FF2B5EF4-FFF2-40B4-BE49-F238E27FC236}">
-                <a16:creationId xmlns:a16="http://schemas.microsoft.com/office/drawing/2014/main" id="{823F5FA2-8599-C70B-5DA4-0CEB9F15AE33}"/>
+                <a16:creationId xmlns:a16="http://schemas.microsoft.com/office/drawing/2014/main" id="{A479817F-D975-B443-3EBA-258C89ECD804}"/>
               </a:ext>
             </a:extLst>
           </p:cNvPr>
@@ -5403,7 +5453,7 @@
           <p:cNvPr id="3" name="テキスト ボックス 2">
             <a:extLst>
               <a:ext uri="{FF2B5EF4-FFF2-40B4-BE49-F238E27FC236}">
-                <a16:creationId xmlns:a16="http://schemas.microsoft.com/office/drawing/2014/main" id="{47642769-BFD0-5C4C-DBFB-6AD9026A2647}"/>
+                <a16:creationId xmlns:a16="http://schemas.microsoft.com/office/drawing/2014/main" id="{F7C4AD14-83D0-6279-7889-1F6552F08C88}"/>
               </a:ext>
             </a:extLst>
           </p:cNvPr>
@@ -5427,20 +5477,14 @@
           <a:lstStyle/>
           <a:p>
             <a:r>
-              <a:rPr kumimoji="1" lang="en-US" altLang="ja-JP" sz="3400" b="1">
+              <a:rPr kumimoji="1" lang="ja-JP" altLang="en-US" sz="3400" b="1">
                 <a:solidFill>
                   <a:srgbClr val="111111"/>
                 </a:solidFill>
                 <a:latin typeface="Arial" panose="020B0604020202020204" pitchFamily="34" charset="0"/>
               </a:rPr>
-              <a:t>READ THE FULL ARTICLE</a:t>
-            </a:r>
-            <a:endParaRPr kumimoji="1" lang="ja-JP" altLang="en-US" sz="3400" b="1">
-              <a:solidFill>
-                <a:srgbClr val="111111"/>
-              </a:solidFill>
-              <a:latin typeface="Arial" panose="020B0604020202020204" pitchFamily="34" charset="0"/>
-            </a:endParaRPr>
+              <a:t>詳しくは積み上げログへ</a:t>
+            </a:r>
           </a:p>
         </p:txBody>
       </p:sp>
@@ -5449,7 +5493,7 @@
           <p:cNvPr id="4" name="テキスト ボックス 3">
             <a:extLst>
               <a:ext uri="{FF2B5EF4-FFF2-40B4-BE49-F238E27FC236}">
-                <a16:creationId xmlns:a16="http://schemas.microsoft.com/office/drawing/2014/main" id="{164ABFD6-410B-E73B-B35F-F6B6C96B7A05}"/>
+                <a16:creationId xmlns:a16="http://schemas.microsoft.com/office/drawing/2014/main" id="{BFE7EDAF-6D8E-AA4F-FBC9-4CA2ABA8F353}"/>
               </a:ext>
             </a:extLst>
           </p:cNvPr>
@@ -5473,14 +5517,32 @@
           <a:lstStyle/>
           <a:p>
             <a:r>
-              <a:rPr kumimoji="1" lang="sv-SE" altLang="ja-JP" sz="2000">
+              <a:rPr kumimoji="1" lang="zh-TW" altLang="en-US" sz="2000">
+                <a:solidFill>
+                  <a:srgbClr val="333333"/>
+                </a:solidFill>
+                <a:latin typeface="Arial" panose="020B0604020202020204" pitchFamily="34" charset="0"/>
+              </a:rPr>
+              <a:t>記事： </a:t>
+            </a:r>
+            <a:r>
+              <a:rPr kumimoji="1" lang="en-US" altLang="zh-TW" sz="2000">
                 <a:solidFill>
                   <a:srgbClr val="333333"/>
                 </a:solidFill>
                 <a:latin typeface="Arial" panose="020B0604020202020204" pitchFamily="34" charset="0"/>
               </a:rPr>
               <a:t>https://syunnjack.dev/articles/asia-trip-concierge
-TSUMIAGE LOG</a:t>
+</a:t>
+            </a:r>
+            <a:r>
+              <a:rPr kumimoji="1" lang="zh-TW" altLang="en-US" sz="2000">
+                <a:solidFill>
+                  <a:srgbClr val="333333"/>
+                </a:solidFill>
+                <a:latin typeface="Arial" panose="020B0604020202020204" pitchFamily="34" charset="0"/>
+              </a:rPr>
+              <a:t>学び、作り、振り返る開発記録。</a:t>
             </a:r>
             <a:endParaRPr kumimoji="1" lang="ja-JP" altLang="en-US" sz="2000">
               <a:solidFill>
@@ -5496,7 +5558,7 @@
           <p:cNvPr id="5" name="テキスト ボックス 4">
             <a:extLst>
               <a:ext uri="{FF2B5EF4-FFF2-40B4-BE49-F238E27FC236}">
-                <a16:creationId xmlns:a16="http://schemas.microsoft.com/office/drawing/2014/main" id="{29D8765E-18B2-3B18-C435-0695A553C7DA}"/>
+                <a16:creationId xmlns:a16="http://schemas.microsoft.com/office/drawing/2014/main" id="{42DCFCFA-A1CE-879F-A846-F9B85465297A}"/>
               </a:ext>
             </a:extLst>
           </p:cNvPr>
@@ -5543,7 +5605,7 @@
             <a:hlinkClick r:id="" action="ppaction://media"/>
             <a:extLst>
               <a:ext uri="{FF2B5EF4-FFF2-40B4-BE49-F238E27FC236}">
-                <a16:creationId xmlns:a16="http://schemas.microsoft.com/office/drawing/2014/main" id="{49E2C119-6051-83FD-2990-405E6A87BA26}"/>
+                <a16:creationId xmlns:a16="http://schemas.microsoft.com/office/drawing/2014/main" id="{AD65D564-9A4A-1CDD-41DC-3D134CE88AA5}"/>
               </a:ext>
             </a:extLst>
           </p:cNvPr>
@@ -5578,7 +5640,7 @@
     </p:spTree>
     <p:extLst>
       <p:ext uri="{BB962C8B-B14F-4D97-AF65-F5344CB8AC3E}">
-        <p14:creationId xmlns:p14="http://schemas.microsoft.com/office/powerpoint/2010/main" val="2559500890"/>
+        <p14:creationId xmlns:p14="http://schemas.microsoft.com/office/powerpoint/2010/main" val="805131905"/>
       </p:ext>
     </p:extLst>
   </p:cSld>

--- a/public/videos/repositories/asia-trip-concierge/asia-trip-concierge-tech-preview.pptx
+++ b/public/videos/repositories/asia-trip-concierge/asia-trip-concierge-tech-preview.pptx
@@ -134,7 +134,7 @@
           <p:cNvPr id="2" name="タイトル 1">
             <a:extLst>
               <a:ext uri="{FF2B5EF4-FFF2-40B4-BE49-F238E27FC236}">
-                <a16:creationId xmlns:a16="http://schemas.microsoft.com/office/drawing/2014/main" id="{4400471B-3249-7658-13DF-2CD8031F6DDC}"/>
+                <a16:creationId xmlns:a16="http://schemas.microsoft.com/office/drawing/2014/main" id="{36C288E7-A404-ACE3-E62F-5D837E8E7F72}"/>
               </a:ext>
             </a:extLst>
           </p:cNvPr>
@@ -171,7 +171,7 @@
           <p:cNvPr id="3" name="字幕 2">
             <a:extLst>
               <a:ext uri="{FF2B5EF4-FFF2-40B4-BE49-F238E27FC236}">
-                <a16:creationId xmlns:a16="http://schemas.microsoft.com/office/drawing/2014/main" id="{29B28672-7342-6610-28A7-55866BCA6911}"/>
+                <a16:creationId xmlns:a16="http://schemas.microsoft.com/office/drawing/2014/main" id="{582D8205-D7B7-71A0-6B78-FC87B3117FE8}"/>
               </a:ext>
             </a:extLst>
           </p:cNvPr>
@@ -241,7 +241,7 @@
           <p:cNvPr id="4" name="日付プレースホルダー 3">
             <a:extLst>
               <a:ext uri="{FF2B5EF4-FFF2-40B4-BE49-F238E27FC236}">
-                <a16:creationId xmlns:a16="http://schemas.microsoft.com/office/drawing/2014/main" id="{FEC8FDD2-1386-7C99-8420-143AEC9655F6}"/>
+                <a16:creationId xmlns:a16="http://schemas.microsoft.com/office/drawing/2014/main" id="{DEC1EF15-F0E6-E48B-CF65-8AB12274ED9D}"/>
               </a:ext>
             </a:extLst>
           </p:cNvPr>
@@ -257,7 +257,7 @@
           <a:bodyPr/>
           <a:lstStyle/>
           <a:p>
-            <a:fld id="{69EFDE8D-40B8-48E0-BD24-41E6F9DECD80}" type="datetimeFigureOut">
+            <a:fld id="{31456ECF-70C3-4720-9FAD-C606738E0BBF}" type="datetimeFigureOut">
               <a:rPr kumimoji="1" lang="ja-JP" altLang="en-US" smtClean="0"/>
               <a:t>2026/7/30</a:t>
             </a:fld>
@@ -270,7 +270,7 @@
           <p:cNvPr id="5" name="フッター プレースホルダー 4">
             <a:extLst>
               <a:ext uri="{FF2B5EF4-FFF2-40B4-BE49-F238E27FC236}">
-                <a16:creationId xmlns:a16="http://schemas.microsoft.com/office/drawing/2014/main" id="{565B2E67-C32D-24C6-EBEA-14D6667300CD}"/>
+                <a16:creationId xmlns:a16="http://schemas.microsoft.com/office/drawing/2014/main" id="{EB6C48AE-5B94-F537-7759-A161FD9B45B1}"/>
               </a:ext>
             </a:extLst>
           </p:cNvPr>
@@ -295,7 +295,7 @@
           <p:cNvPr id="6" name="スライド番号プレースホルダー 5">
             <a:extLst>
               <a:ext uri="{FF2B5EF4-FFF2-40B4-BE49-F238E27FC236}">
-                <a16:creationId xmlns:a16="http://schemas.microsoft.com/office/drawing/2014/main" id="{8C0D1061-7A34-2E49-7400-610D59AB209F}"/>
+                <a16:creationId xmlns:a16="http://schemas.microsoft.com/office/drawing/2014/main" id="{3A0E8EED-70D1-8EAB-4D47-990022E85783}"/>
               </a:ext>
             </a:extLst>
           </p:cNvPr>
@@ -311,7 +311,7 @@
           <a:bodyPr/>
           <a:lstStyle/>
           <a:p>
-            <a:fld id="{043EC55A-0D47-41B3-AD36-51B34E2480AE}" type="slidenum">
+            <a:fld id="{697F2CE0-3434-4105-ABB8-872BEE615879}" type="slidenum">
               <a:rPr kumimoji="1" lang="ja-JP" altLang="en-US" smtClean="0"/>
               <a:t>‹#›</a:t>
             </a:fld>
@@ -322,7 +322,7 @@
     </p:spTree>
     <p:extLst>
       <p:ext uri="{BB962C8B-B14F-4D97-AF65-F5344CB8AC3E}">
-        <p14:creationId xmlns:p14="http://schemas.microsoft.com/office/powerpoint/2010/main" val="3159825193"/>
+        <p14:creationId xmlns:p14="http://schemas.microsoft.com/office/powerpoint/2010/main" val="4148223025"/>
       </p:ext>
     </p:extLst>
   </p:cSld>
@@ -354,7 +354,7 @@
           <p:cNvPr id="2" name="タイトル 1">
             <a:extLst>
               <a:ext uri="{FF2B5EF4-FFF2-40B4-BE49-F238E27FC236}">
-                <a16:creationId xmlns:a16="http://schemas.microsoft.com/office/drawing/2014/main" id="{4A562BA1-0359-F994-AD4E-A63CB30BAAAA}"/>
+                <a16:creationId xmlns:a16="http://schemas.microsoft.com/office/drawing/2014/main" id="{0C1B14C2-F17F-E262-F4B9-2369455813EA}"/>
               </a:ext>
             </a:extLst>
           </p:cNvPr>
@@ -382,7 +382,7 @@
           <p:cNvPr id="3" name="縦書きテキスト プレースホルダー 2">
             <a:extLst>
               <a:ext uri="{FF2B5EF4-FFF2-40B4-BE49-F238E27FC236}">
-                <a16:creationId xmlns:a16="http://schemas.microsoft.com/office/drawing/2014/main" id="{A27421C4-AB48-170E-6EA9-AB22955CA7DA}"/>
+                <a16:creationId xmlns:a16="http://schemas.microsoft.com/office/drawing/2014/main" id="{B0AA110E-F6BE-11B5-7DF4-897E27E04E8F}"/>
               </a:ext>
             </a:extLst>
           </p:cNvPr>
@@ -471,7 +471,7 @@
           <p:cNvPr id="4" name="日付プレースホルダー 3">
             <a:extLst>
               <a:ext uri="{FF2B5EF4-FFF2-40B4-BE49-F238E27FC236}">
-                <a16:creationId xmlns:a16="http://schemas.microsoft.com/office/drawing/2014/main" id="{2F1090D5-16D3-DF16-2965-11024CFD56FC}"/>
+                <a16:creationId xmlns:a16="http://schemas.microsoft.com/office/drawing/2014/main" id="{62E247F1-4B9F-FBDC-67D8-ABA6543B23D6}"/>
               </a:ext>
             </a:extLst>
           </p:cNvPr>
@@ -487,7 +487,7 @@
           <a:bodyPr/>
           <a:lstStyle/>
           <a:p>
-            <a:fld id="{69EFDE8D-40B8-48E0-BD24-41E6F9DECD80}" type="datetimeFigureOut">
+            <a:fld id="{31456ECF-70C3-4720-9FAD-C606738E0BBF}" type="datetimeFigureOut">
               <a:rPr kumimoji="1" lang="ja-JP" altLang="en-US" smtClean="0"/>
               <a:t>2026/7/30</a:t>
             </a:fld>
@@ -500,7 +500,7 @@
           <p:cNvPr id="5" name="フッター プレースホルダー 4">
             <a:extLst>
               <a:ext uri="{FF2B5EF4-FFF2-40B4-BE49-F238E27FC236}">
-                <a16:creationId xmlns:a16="http://schemas.microsoft.com/office/drawing/2014/main" id="{12C8BDE6-A1F4-3AD9-7A87-370ADCA67E93}"/>
+                <a16:creationId xmlns:a16="http://schemas.microsoft.com/office/drawing/2014/main" id="{28BCFC93-310C-6DF1-F46E-B87D8C1AEF83}"/>
               </a:ext>
             </a:extLst>
           </p:cNvPr>
@@ -525,7 +525,7 @@
           <p:cNvPr id="6" name="スライド番号プレースホルダー 5">
             <a:extLst>
               <a:ext uri="{FF2B5EF4-FFF2-40B4-BE49-F238E27FC236}">
-                <a16:creationId xmlns:a16="http://schemas.microsoft.com/office/drawing/2014/main" id="{F20B78E1-0C5B-7091-0840-C98056DF6B6E}"/>
+                <a16:creationId xmlns:a16="http://schemas.microsoft.com/office/drawing/2014/main" id="{7A54DC47-CD37-02E8-D0ED-32E9C7A6032A}"/>
               </a:ext>
             </a:extLst>
           </p:cNvPr>
@@ -541,7 +541,7 @@
           <a:bodyPr/>
           <a:lstStyle/>
           <a:p>
-            <a:fld id="{043EC55A-0D47-41B3-AD36-51B34E2480AE}" type="slidenum">
+            <a:fld id="{697F2CE0-3434-4105-ABB8-872BEE615879}" type="slidenum">
               <a:rPr kumimoji="1" lang="ja-JP" altLang="en-US" smtClean="0"/>
               <a:t>‹#›</a:t>
             </a:fld>
@@ -552,7 +552,7 @@
     </p:spTree>
     <p:extLst>
       <p:ext uri="{BB962C8B-B14F-4D97-AF65-F5344CB8AC3E}">
-        <p14:creationId xmlns:p14="http://schemas.microsoft.com/office/powerpoint/2010/main" val="61684995"/>
+        <p14:creationId xmlns:p14="http://schemas.microsoft.com/office/powerpoint/2010/main" val="666887374"/>
       </p:ext>
     </p:extLst>
   </p:cSld>
@@ -584,7 +584,7 @@
           <p:cNvPr id="2" name="縦書きタイトル 1">
             <a:extLst>
               <a:ext uri="{FF2B5EF4-FFF2-40B4-BE49-F238E27FC236}">
-                <a16:creationId xmlns:a16="http://schemas.microsoft.com/office/drawing/2014/main" id="{DFB4A03A-D8F5-5F5F-EE09-FDE5267E0F7C}"/>
+                <a16:creationId xmlns:a16="http://schemas.microsoft.com/office/drawing/2014/main" id="{E819863E-B08F-3FF1-D92F-67248D6BD706}"/>
               </a:ext>
             </a:extLst>
           </p:cNvPr>
@@ -617,7 +617,7 @@
           <p:cNvPr id="3" name="縦書きテキスト プレースホルダー 2">
             <a:extLst>
               <a:ext uri="{FF2B5EF4-FFF2-40B4-BE49-F238E27FC236}">
-                <a16:creationId xmlns:a16="http://schemas.microsoft.com/office/drawing/2014/main" id="{E892D83B-A2D0-62CD-941F-B101027F5A76}"/>
+                <a16:creationId xmlns:a16="http://schemas.microsoft.com/office/drawing/2014/main" id="{30B8BC13-7CB7-D9BB-D250-823F3DFD24F2}"/>
               </a:ext>
             </a:extLst>
           </p:cNvPr>
@@ -711,7 +711,7 @@
           <p:cNvPr id="4" name="日付プレースホルダー 3">
             <a:extLst>
               <a:ext uri="{FF2B5EF4-FFF2-40B4-BE49-F238E27FC236}">
-                <a16:creationId xmlns:a16="http://schemas.microsoft.com/office/drawing/2014/main" id="{8FF8ACED-AE1A-98AC-D0B6-93D45052F670}"/>
+                <a16:creationId xmlns:a16="http://schemas.microsoft.com/office/drawing/2014/main" id="{8F1A4E39-58C4-92DD-30EF-1B914FAA765C}"/>
               </a:ext>
             </a:extLst>
           </p:cNvPr>
@@ -727,7 +727,7 @@
           <a:bodyPr/>
           <a:lstStyle/>
           <a:p>
-            <a:fld id="{69EFDE8D-40B8-48E0-BD24-41E6F9DECD80}" type="datetimeFigureOut">
+            <a:fld id="{31456ECF-70C3-4720-9FAD-C606738E0BBF}" type="datetimeFigureOut">
               <a:rPr kumimoji="1" lang="ja-JP" altLang="en-US" smtClean="0"/>
               <a:t>2026/7/30</a:t>
             </a:fld>
@@ -740,7 +740,7 @@
           <p:cNvPr id="5" name="フッター プレースホルダー 4">
             <a:extLst>
               <a:ext uri="{FF2B5EF4-FFF2-40B4-BE49-F238E27FC236}">
-                <a16:creationId xmlns:a16="http://schemas.microsoft.com/office/drawing/2014/main" id="{648D62C3-F4EB-864E-DC84-70439A6803D7}"/>
+                <a16:creationId xmlns:a16="http://schemas.microsoft.com/office/drawing/2014/main" id="{9A6B4085-FE21-B2CF-7151-FF3C4FE16750}"/>
               </a:ext>
             </a:extLst>
           </p:cNvPr>
@@ -765,7 +765,7 @@
           <p:cNvPr id="6" name="スライド番号プレースホルダー 5">
             <a:extLst>
               <a:ext uri="{FF2B5EF4-FFF2-40B4-BE49-F238E27FC236}">
-                <a16:creationId xmlns:a16="http://schemas.microsoft.com/office/drawing/2014/main" id="{1870D552-3DE4-CFD6-6244-0B89B64F7006}"/>
+                <a16:creationId xmlns:a16="http://schemas.microsoft.com/office/drawing/2014/main" id="{391BB22F-3133-231E-4022-C7AB065333B5}"/>
               </a:ext>
             </a:extLst>
           </p:cNvPr>
@@ -781,7 +781,7 @@
           <a:bodyPr/>
           <a:lstStyle/>
           <a:p>
-            <a:fld id="{043EC55A-0D47-41B3-AD36-51B34E2480AE}" type="slidenum">
+            <a:fld id="{697F2CE0-3434-4105-ABB8-872BEE615879}" type="slidenum">
               <a:rPr kumimoji="1" lang="ja-JP" altLang="en-US" smtClean="0"/>
               <a:t>‹#›</a:t>
             </a:fld>
@@ -792,7 +792,7 @@
     </p:spTree>
     <p:extLst>
       <p:ext uri="{BB962C8B-B14F-4D97-AF65-F5344CB8AC3E}">
-        <p14:creationId xmlns:p14="http://schemas.microsoft.com/office/powerpoint/2010/main" val="1206013713"/>
+        <p14:creationId xmlns:p14="http://schemas.microsoft.com/office/powerpoint/2010/main" val="2071366449"/>
       </p:ext>
     </p:extLst>
   </p:cSld>
@@ -824,7 +824,7 @@
           <p:cNvPr id="2" name="タイトル 1">
             <a:extLst>
               <a:ext uri="{FF2B5EF4-FFF2-40B4-BE49-F238E27FC236}">
-                <a16:creationId xmlns:a16="http://schemas.microsoft.com/office/drawing/2014/main" id="{F072FB78-40E3-167C-BF5F-9FD11456C455}"/>
+                <a16:creationId xmlns:a16="http://schemas.microsoft.com/office/drawing/2014/main" id="{66FDC23C-315A-49FA-1017-4AD6D09C15E9}"/>
               </a:ext>
             </a:extLst>
           </p:cNvPr>
@@ -852,7 +852,7 @@
           <p:cNvPr id="3" name="コンテンツ プレースホルダー 2">
             <a:extLst>
               <a:ext uri="{FF2B5EF4-FFF2-40B4-BE49-F238E27FC236}">
-                <a16:creationId xmlns:a16="http://schemas.microsoft.com/office/drawing/2014/main" id="{0BA8F228-2670-7F67-B9FA-8B86B0DC52C6}"/>
+                <a16:creationId xmlns:a16="http://schemas.microsoft.com/office/drawing/2014/main" id="{AB04DB42-4325-6417-659C-14C02166D88F}"/>
               </a:ext>
             </a:extLst>
           </p:cNvPr>
@@ -941,7 +941,7 @@
           <p:cNvPr id="4" name="日付プレースホルダー 3">
             <a:extLst>
               <a:ext uri="{FF2B5EF4-FFF2-40B4-BE49-F238E27FC236}">
-                <a16:creationId xmlns:a16="http://schemas.microsoft.com/office/drawing/2014/main" id="{C47C5708-791A-66AC-7789-B01F1D7AA71B}"/>
+                <a16:creationId xmlns:a16="http://schemas.microsoft.com/office/drawing/2014/main" id="{40EB0862-B19C-8FB0-8F83-1BAF63FCCE86}"/>
               </a:ext>
             </a:extLst>
           </p:cNvPr>
@@ -957,7 +957,7 @@
           <a:bodyPr/>
           <a:lstStyle/>
           <a:p>
-            <a:fld id="{69EFDE8D-40B8-48E0-BD24-41E6F9DECD80}" type="datetimeFigureOut">
+            <a:fld id="{31456ECF-70C3-4720-9FAD-C606738E0BBF}" type="datetimeFigureOut">
               <a:rPr kumimoji="1" lang="ja-JP" altLang="en-US" smtClean="0"/>
               <a:t>2026/7/30</a:t>
             </a:fld>
@@ -970,7 +970,7 @@
           <p:cNvPr id="5" name="フッター プレースホルダー 4">
             <a:extLst>
               <a:ext uri="{FF2B5EF4-FFF2-40B4-BE49-F238E27FC236}">
-                <a16:creationId xmlns:a16="http://schemas.microsoft.com/office/drawing/2014/main" id="{323E5484-B4E3-68DF-22B5-55663E24E493}"/>
+                <a16:creationId xmlns:a16="http://schemas.microsoft.com/office/drawing/2014/main" id="{6C565266-7C8F-DAC3-6A60-4EA76D1A58FB}"/>
               </a:ext>
             </a:extLst>
           </p:cNvPr>
@@ -995,7 +995,7 @@
           <p:cNvPr id="6" name="スライド番号プレースホルダー 5">
             <a:extLst>
               <a:ext uri="{FF2B5EF4-FFF2-40B4-BE49-F238E27FC236}">
-                <a16:creationId xmlns:a16="http://schemas.microsoft.com/office/drawing/2014/main" id="{85D8B2D1-A6F3-AA73-1D3A-744BE742F3C9}"/>
+                <a16:creationId xmlns:a16="http://schemas.microsoft.com/office/drawing/2014/main" id="{7ECE9223-7618-6AA5-3F73-6D21F9CF3235}"/>
               </a:ext>
             </a:extLst>
           </p:cNvPr>
@@ -1011,7 +1011,7 @@
           <a:bodyPr/>
           <a:lstStyle/>
           <a:p>
-            <a:fld id="{043EC55A-0D47-41B3-AD36-51B34E2480AE}" type="slidenum">
+            <a:fld id="{697F2CE0-3434-4105-ABB8-872BEE615879}" type="slidenum">
               <a:rPr kumimoji="1" lang="ja-JP" altLang="en-US" smtClean="0"/>
               <a:t>‹#›</a:t>
             </a:fld>
@@ -1022,7 +1022,7 @@
     </p:spTree>
     <p:extLst>
       <p:ext uri="{BB962C8B-B14F-4D97-AF65-F5344CB8AC3E}">
-        <p14:creationId xmlns:p14="http://schemas.microsoft.com/office/powerpoint/2010/main" val="917589918"/>
+        <p14:creationId xmlns:p14="http://schemas.microsoft.com/office/powerpoint/2010/main" val="748761086"/>
       </p:ext>
     </p:extLst>
   </p:cSld>
@@ -1054,7 +1054,7 @@
           <p:cNvPr id="2" name="タイトル 1">
             <a:extLst>
               <a:ext uri="{FF2B5EF4-FFF2-40B4-BE49-F238E27FC236}">
-                <a16:creationId xmlns:a16="http://schemas.microsoft.com/office/drawing/2014/main" id="{653552CC-5E23-0E43-FCF0-50F998F78914}"/>
+                <a16:creationId xmlns:a16="http://schemas.microsoft.com/office/drawing/2014/main" id="{BBD04D98-A529-AD19-53A5-45031579DCA0}"/>
               </a:ext>
             </a:extLst>
           </p:cNvPr>
@@ -1091,7 +1091,7 @@
           <p:cNvPr id="3" name="テキスト プレースホルダー 2">
             <a:extLst>
               <a:ext uri="{FF2B5EF4-FFF2-40B4-BE49-F238E27FC236}">
-                <a16:creationId xmlns:a16="http://schemas.microsoft.com/office/drawing/2014/main" id="{11DDECE3-3C83-05E7-D52F-0DE3F0507C30}"/>
+                <a16:creationId xmlns:a16="http://schemas.microsoft.com/office/drawing/2014/main" id="{8D28C484-A5CE-3528-4BF4-D2DDBFD52B08}"/>
               </a:ext>
             </a:extLst>
           </p:cNvPr>
@@ -1216,7 +1216,7 @@
           <p:cNvPr id="4" name="日付プレースホルダー 3">
             <a:extLst>
               <a:ext uri="{FF2B5EF4-FFF2-40B4-BE49-F238E27FC236}">
-                <a16:creationId xmlns:a16="http://schemas.microsoft.com/office/drawing/2014/main" id="{8B9BA4C7-002A-9FE6-D34E-BE9D97D9F52F}"/>
+                <a16:creationId xmlns:a16="http://schemas.microsoft.com/office/drawing/2014/main" id="{A180A22B-0770-B72A-8BC7-0E9438A9F7FB}"/>
               </a:ext>
             </a:extLst>
           </p:cNvPr>
@@ -1232,7 +1232,7 @@
           <a:bodyPr/>
           <a:lstStyle/>
           <a:p>
-            <a:fld id="{69EFDE8D-40B8-48E0-BD24-41E6F9DECD80}" type="datetimeFigureOut">
+            <a:fld id="{31456ECF-70C3-4720-9FAD-C606738E0BBF}" type="datetimeFigureOut">
               <a:rPr kumimoji="1" lang="ja-JP" altLang="en-US" smtClean="0"/>
               <a:t>2026/7/30</a:t>
             </a:fld>
@@ -1245,7 +1245,7 @@
           <p:cNvPr id="5" name="フッター プレースホルダー 4">
             <a:extLst>
               <a:ext uri="{FF2B5EF4-FFF2-40B4-BE49-F238E27FC236}">
-                <a16:creationId xmlns:a16="http://schemas.microsoft.com/office/drawing/2014/main" id="{13856CE7-0D12-636C-9D72-7DDF3A8BCC9F}"/>
+                <a16:creationId xmlns:a16="http://schemas.microsoft.com/office/drawing/2014/main" id="{7DF6E036-BA71-4606-B673-CF9ABA9FFD66}"/>
               </a:ext>
             </a:extLst>
           </p:cNvPr>
@@ -1270,7 +1270,7 @@
           <p:cNvPr id="6" name="スライド番号プレースホルダー 5">
             <a:extLst>
               <a:ext uri="{FF2B5EF4-FFF2-40B4-BE49-F238E27FC236}">
-                <a16:creationId xmlns:a16="http://schemas.microsoft.com/office/drawing/2014/main" id="{3400108D-D91C-F95D-371C-02726F6A4275}"/>
+                <a16:creationId xmlns:a16="http://schemas.microsoft.com/office/drawing/2014/main" id="{36B81FBE-8ACC-AF24-1AA8-2AAC1C3C335F}"/>
               </a:ext>
             </a:extLst>
           </p:cNvPr>
@@ -1286,7 +1286,7 @@
           <a:bodyPr/>
           <a:lstStyle/>
           <a:p>
-            <a:fld id="{043EC55A-0D47-41B3-AD36-51B34E2480AE}" type="slidenum">
+            <a:fld id="{697F2CE0-3434-4105-ABB8-872BEE615879}" type="slidenum">
               <a:rPr kumimoji="1" lang="ja-JP" altLang="en-US" smtClean="0"/>
               <a:t>‹#›</a:t>
             </a:fld>
@@ -1297,7 +1297,7 @@
     </p:spTree>
     <p:extLst>
       <p:ext uri="{BB962C8B-B14F-4D97-AF65-F5344CB8AC3E}">
-        <p14:creationId xmlns:p14="http://schemas.microsoft.com/office/powerpoint/2010/main" val="3130119826"/>
+        <p14:creationId xmlns:p14="http://schemas.microsoft.com/office/powerpoint/2010/main" val="3089732205"/>
       </p:ext>
     </p:extLst>
   </p:cSld>
@@ -1329,7 +1329,7 @@
           <p:cNvPr id="2" name="タイトル 1">
             <a:extLst>
               <a:ext uri="{FF2B5EF4-FFF2-40B4-BE49-F238E27FC236}">
-                <a16:creationId xmlns:a16="http://schemas.microsoft.com/office/drawing/2014/main" id="{4E35C0E5-4CA9-A96B-2316-C956799AC777}"/>
+                <a16:creationId xmlns:a16="http://schemas.microsoft.com/office/drawing/2014/main" id="{6695218F-51C9-3014-6D76-A1A455B5EE4A}"/>
               </a:ext>
             </a:extLst>
           </p:cNvPr>
@@ -1357,7 +1357,7 @@
           <p:cNvPr id="3" name="コンテンツ プレースホルダー 2">
             <a:extLst>
               <a:ext uri="{FF2B5EF4-FFF2-40B4-BE49-F238E27FC236}">
-                <a16:creationId xmlns:a16="http://schemas.microsoft.com/office/drawing/2014/main" id="{0E7C261C-5C56-97CB-3F4D-64EEF38679E3}"/>
+                <a16:creationId xmlns:a16="http://schemas.microsoft.com/office/drawing/2014/main" id="{FFFFB634-8EEF-1058-FE98-27989D8DEA60}"/>
               </a:ext>
             </a:extLst>
           </p:cNvPr>
@@ -1451,7 +1451,7 @@
           <p:cNvPr id="4" name="コンテンツ プレースホルダー 3">
             <a:extLst>
               <a:ext uri="{FF2B5EF4-FFF2-40B4-BE49-F238E27FC236}">
-                <a16:creationId xmlns:a16="http://schemas.microsoft.com/office/drawing/2014/main" id="{87D96402-3714-19F1-9ECF-730C3B9AB4C9}"/>
+                <a16:creationId xmlns:a16="http://schemas.microsoft.com/office/drawing/2014/main" id="{F60F5779-E50E-3C6D-E5F7-3C40C817452A}"/>
               </a:ext>
             </a:extLst>
           </p:cNvPr>
@@ -1545,7 +1545,7 @@
           <p:cNvPr id="5" name="日付プレースホルダー 4">
             <a:extLst>
               <a:ext uri="{FF2B5EF4-FFF2-40B4-BE49-F238E27FC236}">
-                <a16:creationId xmlns:a16="http://schemas.microsoft.com/office/drawing/2014/main" id="{D469FC8F-24E7-B71B-59D5-04F54129B70F}"/>
+                <a16:creationId xmlns:a16="http://schemas.microsoft.com/office/drawing/2014/main" id="{77434C6E-F07C-21EC-6F17-021114A47CE6}"/>
               </a:ext>
             </a:extLst>
           </p:cNvPr>
@@ -1561,7 +1561,7 @@
           <a:bodyPr/>
           <a:lstStyle/>
           <a:p>
-            <a:fld id="{69EFDE8D-40B8-48E0-BD24-41E6F9DECD80}" type="datetimeFigureOut">
+            <a:fld id="{31456ECF-70C3-4720-9FAD-C606738E0BBF}" type="datetimeFigureOut">
               <a:rPr kumimoji="1" lang="ja-JP" altLang="en-US" smtClean="0"/>
               <a:t>2026/7/30</a:t>
             </a:fld>
@@ -1574,7 +1574,7 @@
           <p:cNvPr id="6" name="フッター プレースホルダー 5">
             <a:extLst>
               <a:ext uri="{FF2B5EF4-FFF2-40B4-BE49-F238E27FC236}">
-                <a16:creationId xmlns:a16="http://schemas.microsoft.com/office/drawing/2014/main" id="{3F413464-609A-5CAA-B0E1-09A88AC77338}"/>
+                <a16:creationId xmlns:a16="http://schemas.microsoft.com/office/drawing/2014/main" id="{E0DCDE68-9533-D4AA-EBA3-354BE4720117}"/>
               </a:ext>
             </a:extLst>
           </p:cNvPr>
@@ -1599,7 +1599,7 @@
           <p:cNvPr id="7" name="スライド番号プレースホルダー 6">
             <a:extLst>
               <a:ext uri="{FF2B5EF4-FFF2-40B4-BE49-F238E27FC236}">
-                <a16:creationId xmlns:a16="http://schemas.microsoft.com/office/drawing/2014/main" id="{0B0B9EC4-BE96-542B-52BB-D69D10147AE9}"/>
+                <a16:creationId xmlns:a16="http://schemas.microsoft.com/office/drawing/2014/main" id="{998C8EF2-22F5-272F-1056-298D6A4BC194}"/>
               </a:ext>
             </a:extLst>
           </p:cNvPr>
@@ -1615,7 +1615,7 @@
           <a:bodyPr/>
           <a:lstStyle/>
           <a:p>
-            <a:fld id="{043EC55A-0D47-41B3-AD36-51B34E2480AE}" type="slidenum">
+            <a:fld id="{697F2CE0-3434-4105-ABB8-872BEE615879}" type="slidenum">
               <a:rPr kumimoji="1" lang="ja-JP" altLang="en-US" smtClean="0"/>
               <a:t>‹#›</a:t>
             </a:fld>
@@ -1626,7 +1626,7 @@
     </p:spTree>
     <p:extLst>
       <p:ext uri="{BB962C8B-B14F-4D97-AF65-F5344CB8AC3E}">
-        <p14:creationId xmlns:p14="http://schemas.microsoft.com/office/powerpoint/2010/main" val="1600938114"/>
+        <p14:creationId xmlns:p14="http://schemas.microsoft.com/office/powerpoint/2010/main" val="3977757501"/>
       </p:ext>
     </p:extLst>
   </p:cSld>
@@ -1658,7 +1658,7 @@
           <p:cNvPr id="2" name="タイトル 1">
             <a:extLst>
               <a:ext uri="{FF2B5EF4-FFF2-40B4-BE49-F238E27FC236}">
-                <a16:creationId xmlns:a16="http://schemas.microsoft.com/office/drawing/2014/main" id="{BF659EBC-B30D-1990-597D-872008494244}"/>
+                <a16:creationId xmlns:a16="http://schemas.microsoft.com/office/drawing/2014/main" id="{FF78DAF4-D359-E5E3-B409-9C96F41EFCB2}"/>
               </a:ext>
             </a:extLst>
           </p:cNvPr>
@@ -1691,7 +1691,7 @@
           <p:cNvPr id="3" name="テキスト プレースホルダー 2">
             <a:extLst>
               <a:ext uri="{FF2B5EF4-FFF2-40B4-BE49-F238E27FC236}">
-                <a16:creationId xmlns:a16="http://schemas.microsoft.com/office/drawing/2014/main" id="{C07C5B29-324D-B24B-5085-DBD5B4A8FFE5}"/>
+                <a16:creationId xmlns:a16="http://schemas.microsoft.com/office/drawing/2014/main" id="{E30C5E25-D369-6F3C-EABD-B03D01139B60}"/>
               </a:ext>
             </a:extLst>
           </p:cNvPr>
@@ -1762,7 +1762,7 @@
           <p:cNvPr id="4" name="コンテンツ プレースホルダー 3">
             <a:extLst>
               <a:ext uri="{FF2B5EF4-FFF2-40B4-BE49-F238E27FC236}">
-                <a16:creationId xmlns:a16="http://schemas.microsoft.com/office/drawing/2014/main" id="{8AC20A93-A47C-680F-9B2F-6825F8BBFD7C}"/>
+                <a16:creationId xmlns:a16="http://schemas.microsoft.com/office/drawing/2014/main" id="{6DC04ED3-34A6-94DC-BD40-57DBCC6358DF}"/>
               </a:ext>
             </a:extLst>
           </p:cNvPr>
@@ -1856,7 +1856,7 @@
           <p:cNvPr id="5" name="テキスト プレースホルダー 4">
             <a:extLst>
               <a:ext uri="{FF2B5EF4-FFF2-40B4-BE49-F238E27FC236}">
-                <a16:creationId xmlns:a16="http://schemas.microsoft.com/office/drawing/2014/main" id="{3CEF6AC2-4E21-AC7D-2AAA-EBFD4050FDDD}"/>
+                <a16:creationId xmlns:a16="http://schemas.microsoft.com/office/drawing/2014/main" id="{DE3025EE-A9FC-AE10-0041-31FB4596B22A}"/>
               </a:ext>
             </a:extLst>
           </p:cNvPr>
@@ -1927,7 +1927,7 @@
           <p:cNvPr id="6" name="コンテンツ プレースホルダー 5">
             <a:extLst>
               <a:ext uri="{FF2B5EF4-FFF2-40B4-BE49-F238E27FC236}">
-                <a16:creationId xmlns:a16="http://schemas.microsoft.com/office/drawing/2014/main" id="{B935AF05-C7FA-D67E-1598-E4E4AE07A08A}"/>
+                <a16:creationId xmlns:a16="http://schemas.microsoft.com/office/drawing/2014/main" id="{6C7F0B2B-B06E-4D67-8C89-D4D87D7EFC01}"/>
               </a:ext>
             </a:extLst>
           </p:cNvPr>
@@ -2021,7 +2021,7 @@
           <p:cNvPr id="7" name="日付プレースホルダー 6">
             <a:extLst>
               <a:ext uri="{FF2B5EF4-FFF2-40B4-BE49-F238E27FC236}">
-                <a16:creationId xmlns:a16="http://schemas.microsoft.com/office/drawing/2014/main" id="{066315F7-1201-6FEB-A0F2-C7EC25558C34}"/>
+                <a16:creationId xmlns:a16="http://schemas.microsoft.com/office/drawing/2014/main" id="{19EDC5D2-7E03-B7CE-58DF-C67518AFA0DB}"/>
               </a:ext>
             </a:extLst>
           </p:cNvPr>
@@ -2037,7 +2037,7 @@
           <a:bodyPr/>
           <a:lstStyle/>
           <a:p>
-            <a:fld id="{69EFDE8D-40B8-48E0-BD24-41E6F9DECD80}" type="datetimeFigureOut">
+            <a:fld id="{31456ECF-70C3-4720-9FAD-C606738E0BBF}" type="datetimeFigureOut">
               <a:rPr kumimoji="1" lang="ja-JP" altLang="en-US" smtClean="0"/>
               <a:t>2026/7/30</a:t>
             </a:fld>
@@ -2050,7 +2050,7 @@
           <p:cNvPr id="8" name="フッター プレースホルダー 7">
             <a:extLst>
               <a:ext uri="{FF2B5EF4-FFF2-40B4-BE49-F238E27FC236}">
-                <a16:creationId xmlns:a16="http://schemas.microsoft.com/office/drawing/2014/main" id="{7DED79F8-A602-CC04-73B1-BCFAFA58D646}"/>
+                <a16:creationId xmlns:a16="http://schemas.microsoft.com/office/drawing/2014/main" id="{2C9FA29E-DB6B-EE68-DCA7-A668E06857E3}"/>
               </a:ext>
             </a:extLst>
           </p:cNvPr>
@@ -2075,7 +2075,7 @@
           <p:cNvPr id="9" name="スライド番号プレースホルダー 8">
             <a:extLst>
               <a:ext uri="{FF2B5EF4-FFF2-40B4-BE49-F238E27FC236}">
-                <a16:creationId xmlns:a16="http://schemas.microsoft.com/office/drawing/2014/main" id="{4E121683-CA14-46F4-B63D-115C553A0AC1}"/>
+                <a16:creationId xmlns:a16="http://schemas.microsoft.com/office/drawing/2014/main" id="{8B275F73-2E9D-7659-C812-53EAED11D87E}"/>
               </a:ext>
             </a:extLst>
           </p:cNvPr>
@@ -2091,7 +2091,7 @@
           <a:bodyPr/>
           <a:lstStyle/>
           <a:p>
-            <a:fld id="{043EC55A-0D47-41B3-AD36-51B34E2480AE}" type="slidenum">
+            <a:fld id="{697F2CE0-3434-4105-ABB8-872BEE615879}" type="slidenum">
               <a:rPr kumimoji="1" lang="ja-JP" altLang="en-US" smtClean="0"/>
               <a:t>‹#›</a:t>
             </a:fld>
@@ -2102,7 +2102,7 @@
     </p:spTree>
     <p:extLst>
       <p:ext uri="{BB962C8B-B14F-4D97-AF65-F5344CB8AC3E}">
-        <p14:creationId xmlns:p14="http://schemas.microsoft.com/office/powerpoint/2010/main" val="3939111475"/>
+        <p14:creationId xmlns:p14="http://schemas.microsoft.com/office/powerpoint/2010/main" val="3836751146"/>
       </p:ext>
     </p:extLst>
   </p:cSld>
@@ -2134,7 +2134,7 @@
           <p:cNvPr id="2" name="タイトル 1">
             <a:extLst>
               <a:ext uri="{FF2B5EF4-FFF2-40B4-BE49-F238E27FC236}">
-                <a16:creationId xmlns:a16="http://schemas.microsoft.com/office/drawing/2014/main" id="{837F08B7-A57E-58C1-2EE1-EF5F8E1B54F5}"/>
+                <a16:creationId xmlns:a16="http://schemas.microsoft.com/office/drawing/2014/main" id="{BB92D7CF-9689-61E5-9A93-1634A36F1576}"/>
               </a:ext>
             </a:extLst>
           </p:cNvPr>
@@ -2162,7 +2162,7 @@
           <p:cNvPr id="3" name="日付プレースホルダー 2">
             <a:extLst>
               <a:ext uri="{FF2B5EF4-FFF2-40B4-BE49-F238E27FC236}">
-                <a16:creationId xmlns:a16="http://schemas.microsoft.com/office/drawing/2014/main" id="{D8CEFDC5-6DC1-1EDF-5F26-CC239A951125}"/>
+                <a16:creationId xmlns:a16="http://schemas.microsoft.com/office/drawing/2014/main" id="{B485A39C-D2B5-74A3-9888-96D6E5D3D21C}"/>
               </a:ext>
             </a:extLst>
           </p:cNvPr>
@@ -2178,7 +2178,7 @@
           <a:bodyPr/>
           <a:lstStyle/>
           <a:p>
-            <a:fld id="{69EFDE8D-40B8-48E0-BD24-41E6F9DECD80}" type="datetimeFigureOut">
+            <a:fld id="{31456ECF-70C3-4720-9FAD-C606738E0BBF}" type="datetimeFigureOut">
               <a:rPr kumimoji="1" lang="ja-JP" altLang="en-US" smtClean="0"/>
               <a:t>2026/7/30</a:t>
             </a:fld>
@@ -2191,7 +2191,7 @@
           <p:cNvPr id="4" name="フッター プレースホルダー 3">
             <a:extLst>
               <a:ext uri="{FF2B5EF4-FFF2-40B4-BE49-F238E27FC236}">
-                <a16:creationId xmlns:a16="http://schemas.microsoft.com/office/drawing/2014/main" id="{97F7DF55-0BD9-877A-8D3A-67D0AECCCF89}"/>
+                <a16:creationId xmlns:a16="http://schemas.microsoft.com/office/drawing/2014/main" id="{D1603244-7A5F-897E-B0F8-83E3EFFCDEFB}"/>
               </a:ext>
             </a:extLst>
           </p:cNvPr>
@@ -2216,7 +2216,7 @@
           <p:cNvPr id="5" name="スライド番号プレースホルダー 4">
             <a:extLst>
               <a:ext uri="{FF2B5EF4-FFF2-40B4-BE49-F238E27FC236}">
-                <a16:creationId xmlns:a16="http://schemas.microsoft.com/office/drawing/2014/main" id="{EF0790C3-401A-1AB1-58CD-4B6F42404C69}"/>
+                <a16:creationId xmlns:a16="http://schemas.microsoft.com/office/drawing/2014/main" id="{C6A95A0F-C88D-2D05-EC6B-A2E83ADCE0FF}"/>
               </a:ext>
             </a:extLst>
           </p:cNvPr>
@@ -2232,7 +2232,7 @@
           <a:bodyPr/>
           <a:lstStyle/>
           <a:p>
-            <a:fld id="{043EC55A-0D47-41B3-AD36-51B34E2480AE}" type="slidenum">
+            <a:fld id="{697F2CE0-3434-4105-ABB8-872BEE615879}" type="slidenum">
               <a:rPr kumimoji="1" lang="ja-JP" altLang="en-US" smtClean="0"/>
               <a:t>‹#›</a:t>
             </a:fld>
@@ -2243,7 +2243,7 @@
     </p:spTree>
     <p:extLst>
       <p:ext uri="{BB962C8B-B14F-4D97-AF65-F5344CB8AC3E}">
-        <p14:creationId xmlns:p14="http://schemas.microsoft.com/office/powerpoint/2010/main" val="2514666339"/>
+        <p14:creationId xmlns:p14="http://schemas.microsoft.com/office/powerpoint/2010/main" val="634541203"/>
       </p:ext>
     </p:extLst>
   </p:cSld>
@@ -2275,7 +2275,7 @@
           <p:cNvPr id="2" name="日付プレースホルダー 1">
             <a:extLst>
               <a:ext uri="{FF2B5EF4-FFF2-40B4-BE49-F238E27FC236}">
-                <a16:creationId xmlns:a16="http://schemas.microsoft.com/office/drawing/2014/main" id="{3D5AFEB0-02B7-057D-9B07-5ECB379B7EFC}"/>
+                <a16:creationId xmlns:a16="http://schemas.microsoft.com/office/drawing/2014/main" id="{248AD77F-2FF9-1E26-F7E7-CE1C43BEA78B}"/>
               </a:ext>
             </a:extLst>
           </p:cNvPr>
@@ -2291,7 +2291,7 @@
           <a:bodyPr/>
           <a:lstStyle/>
           <a:p>
-            <a:fld id="{69EFDE8D-40B8-48E0-BD24-41E6F9DECD80}" type="datetimeFigureOut">
+            <a:fld id="{31456ECF-70C3-4720-9FAD-C606738E0BBF}" type="datetimeFigureOut">
               <a:rPr kumimoji="1" lang="ja-JP" altLang="en-US" smtClean="0"/>
               <a:t>2026/7/30</a:t>
             </a:fld>
@@ -2304,7 +2304,7 @@
           <p:cNvPr id="3" name="フッター プレースホルダー 2">
             <a:extLst>
               <a:ext uri="{FF2B5EF4-FFF2-40B4-BE49-F238E27FC236}">
-                <a16:creationId xmlns:a16="http://schemas.microsoft.com/office/drawing/2014/main" id="{2D43FBE4-A1A9-BA7A-FF64-72DB8A38CC6B}"/>
+                <a16:creationId xmlns:a16="http://schemas.microsoft.com/office/drawing/2014/main" id="{C4B72A6B-2F1B-7435-442B-AA56E7A8DF1C}"/>
               </a:ext>
             </a:extLst>
           </p:cNvPr>
@@ -2329,7 +2329,7 @@
           <p:cNvPr id="4" name="スライド番号プレースホルダー 3">
             <a:extLst>
               <a:ext uri="{FF2B5EF4-FFF2-40B4-BE49-F238E27FC236}">
-                <a16:creationId xmlns:a16="http://schemas.microsoft.com/office/drawing/2014/main" id="{10910FF8-14D2-ABD2-EEF1-96AF43D6FC4D}"/>
+                <a16:creationId xmlns:a16="http://schemas.microsoft.com/office/drawing/2014/main" id="{80DD0251-13DF-2746-2580-E378B212EF04}"/>
               </a:ext>
             </a:extLst>
           </p:cNvPr>
@@ -2345,7 +2345,7 @@
           <a:bodyPr/>
           <a:lstStyle/>
           <a:p>
-            <a:fld id="{043EC55A-0D47-41B3-AD36-51B34E2480AE}" type="slidenum">
+            <a:fld id="{697F2CE0-3434-4105-ABB8-872BEE615879}" type="slidenum">
               <a:rPr kumimoji="1" lang="ja-JP" altLang="en-US" smtClean="0"/>
               <a:t>‹#›</a:t>
             </a:fld>
@@ -2356,7 +2356,7 @@
     </p:spTree>
     <p:extLst>
       <p:ext uri="{BB962C8B-B14F-4D97-AF65-F5344CB8AC3E}">
-        <p14:creationId xmlns:p14="http://schemas.microsoft.com/office/powerpoint/2010/main" val="1665437044"/>
+        <p14:creationId xmlns:p14="http://schemas.microsoft.com/office/powerpoint/2010/main" val="771243858"/>
       </p:ext>
     </p:extLst>
   </p:cSld>
@@ -2388,7 +2388,7 @@
           <p:cNvPr id="2" name="タイトル 1">
             <a:extLst>
               <a:ext uri="{FF2B5EF4-FFF2-40B4-BE49-F238E27FC236}">
-                <a16:creationId xmlns:a16="http://schemas.microsoft.com/office/drawing/2014/main" id="{D546AE76-1E04-AC9D-6459-E367F7F992B4}"/>
+                <a16:creationId xmlns:a16="http://schemas.microsoft.com/office/drawing/2014/main" id="{785328FE-4D28-0A0A-8D5E-96B1B48544BB}"/>
               </a:ext>
             </a:extLst>
           </p:cNvPr>
@@ -2425,7 +2425,7 @@
           <p:cNvPr id="3" name="コンテンツ プレースホルダー 2">
             <a:extLst>
               <a:ext uri="{FF2B5EF4-FFF2-40B4-BE49-F238E27FC236}">
-                <a16:creationId xmlns:a16="http://schemas.microsoft.com/office/drawing/2014/main" id="{26944D13-FE2B-3E2D-E79D-50A94C606607}"/>
+                <a16:creationId xmlns:a16="http://schemas.microsoft.com/office/drawing/2014/main" id="{6800838F-5449-17C1-D989-791788FE9D6A}"/>
               </a:ext>
             </a:extLst>
           </p:cNvPr>
@@ -2547,7 +2547,7 @@
           <p:cNvPr id="4" name="テキスト プレースホルダー 3">
             <a:extLst>
               <a:ext uri="{FF2B5EF4-FFF2-40B4-BE49-F238E27FC236}">
-                <a16:creationId xmlns:a16="http://schemas.microsoft.com/office/drawing/2014/main" id="{BD4F168E-2D5B-01EF-6139-EC2758E13BFE}"/>
+                <a16:creationId xmlns:a16="http://schemas.microsoft.com/office/drawing/2014/main" id="{3011A930-5F91-915F-7007-A0DDC5DBAB97}"/>
               </a:ext>
             </a:extLst>
           </p:cNvPr>
@@ -2618,7 +2618,7 @@
           <p:cNvPr id="5" name="日付プレースホルダー 4">
             <a:extLst>
               <a:ext uri="{FF2B5EF4-FFF2-40B4-BE49-F238E27FC236}">
-                <a16:creationId xmlns:a16="http://schemas.microsoft.com/office/drawing/2014/main" id="{9E1E94BF-2207-3EF2-BA7B-B3288139BE95}"/>
+                <a16:creationId xmlns:a16="http://schemas.microsoft.com/office/drawing/2014/main" id="{C1EBC62E-68E6-1C9A-AD4D-BCA384EDBE29}"/>
               </a:ext>
             </a:extLst>
           </p:cNvPr>
@@ -2634,7 +2634,7 @@
           <a:bodyPr/>
           <a:lstStyle/>
           <a:p>
-            <a:fld id="{69EFDE8D-40B8-48E0-BD24-41E6F9DECD80}" type="datetimeFigureOut">
+            <a:fld id="{31456ECF-70C3-4720-9FAD-C606738E0BBF}" type="datetimeFigureOut">
               <a:rPr kumimoji="1" lang="ja-JP" altLang="en-US" smtClean="0"/>
               <a:t>2026/7/30</a:t>
             </a:fld>
@@ -2647,7 +2647,7 @@
           <p:cNvPr id="6" name="フッター プレースホルダー 5">
             <a:extLst>
               <a:ext uri="{FF2B5EF4-FFF2-40B4-BE49-F238E27FC236}">
-                <a16:creationId xmlns:a16="http://schemas.microsoft.com/office/drawing/2014/main" id="{991409AD-CFD2-86A8-DDAA-A2CC424E5A9C}"/>
+                <a16:creationId xmlns:a16="http://schemas.microsoft.com/office/drawing/2014/main" id="{0BCF1E5F-FBBD-157D-ED80-7742BB5C20DA}"/>
               </a:ext>
             </a:extLst>
           </p:cNvPr>
@@ -2672,7 +2672,7 @@
           <p:cNvPr id="7" name="スライド番号プレースホルダー 6">
             <a:extLst>
               <a:ext uri="{FF2B5EF4-FFF2-40B4-BE49-F238E27FC236}">
-                <a16:creationId xmlns:a16="http://schemas.microsoft.com/office/drawing/2014/main" id="{3B13A70C-B462-3630-15AE-3F730636A77F}"/>
+                <a16:creationId xmlns:a16="http://schemas.microsoft.com/office/drawing/2014/main" id="{2B170D2D-212F-EDA3-8302-AA8D2D091BE3}"/>
               </a:ext>
             </a:extLst>
           </p:cNvPr>
@@ -2688,7 +2688,7 @@
           <a:bodyPr/>
           <a:lstStyle/>
           <a:p>
-            <a:fld id="{043EC55A-0D47-41B3-AD36-51B34E2480AE}" type="slidenum">
+            <a:fld id="{697F2CE0-3434-4105-ABB8-872BEE615879}" type="slidenum">
               <a:rPr kumimoji="1" lang="ja-JP" altLang="en-US" smtClean="0"/>
               <a:t>‹#›</a:t>
             </a:fld>
@@ -2699,7 +2699,7 @@
     </p:spTree>
     <p:extLst>
       <p:ext uri="{BB962C8B-B14F-4D97-AF65-F5344CB8AC3E}">
-        <p14:creationId xmlns:p14="http://schemas.microsoft.com/office/powerpoint/2010/main" val="2461531379"/>
+        <p14:creationId xmlns:p14="http://schemas.microsoft.com/office/powerpoint/2010/main" val="3129627086"/>
       </p:ext>
     </p:extLst>
   </p:cSld>
@@ -2731,7 +2731,7 @@
           <p:cNvPr id="2" name="タイトル 1">
             <a:extLst>
               <a:ext uri="{FF2B5EF4-FFF2-40B4-BE49-F238E27FC236}">
-                <a16:creationId xmlns:a16="http://schemas.microsoft.com/office/drawing/2014/main" id="{6BBE9E1C-21EA-CC73-98EC-B3851AE16E37}"/>
+                <a16:creationId xmlns:a16="http://schemas.microsoft.com/office/drawing/2014/main" id="{5D321CCA-B38B-A483-9A3A-50832B15B0B2}"/>
               </a:ext>
             </a:extLst>
           </p:cNvPr>
@@ -2768,7 +2768,7 @@
           <p:cNvPr id="3" name="図プレースホルダー 2">
             <a:extLst>
               <a:ext uri="{FF2B5EF4-FFF2-40B4-BE49-F238E27FC236}">
-                <a16:creationId xmlns:a16="http://schemas.microsoft.com/office/drawing/2014/main" id="{03E6956F-F891-40FB-D468-A308D2A1F1FA}"/>
+                <a16:creationId xmlns:a16="http://schemas.microsoft.com/office/drawing/2014/main" id="{4EA15C76-A83A-5C11-1ED2-774FC0228190}"/>
               </a:ext>
             </a:extLst>
           </p:cNvPr>
@@ -2835,7 +2835,7 @@
           <p:cNvPr id="4" name="テキスト プレースホルダー 3">
             <a:extLst>
               <a:ext uri="{FF2B5EF4-FFF2-40B4-BE49-F238E27FC236}">
-                <a16:creationId xmlns:a16="http://schemas.microsoft.com/office/drawing/2014/main" id="{3A33648B-CDA4-6132-E6F4-4950E12523CC}"/>
+                <a16:creationId xmlns:a16="http://schemas.microsoft.com/office/drawing/2014/main" id="{CEAF9111-45C1-F248-9496-8A43D135E605}"/>
               </a:ext>
             </a:extLst>
           </p:cNvPr>
@@ -2906,7 +2906,7 @@
           <p:cNvPr id="5" name="日付プレースホルダー 4">
             <a:extLst>
               <a:ext uri="{FF2B5EF4-FFF2-40B4-BE49-F238E27FC236}">
-                <a16:creationId xmlns:a16="http://schemas.microsoft.com/office/drawing/2014/main" id="{40941EA3-5D93-5C1D-2485-F39DC9DFA7D9}"/>
+                <a16:creationId xmlns:a16="http://schemas.microsoft.com/office/drawing/2014/main" id="{4EFF7A6F-E641-4D1F-B7DF-0F872FF38982}"/>
               </a:ext>
             </a:extLst>
           </p:cNvPr>
@@ -2922,7 +2922,7 @@
           <a:bodyPr/>
           <a:lstStyle/>
           <a:p>
-            <a:fld id="{69EFDE8D-40B8-48E0-BD24-41E6F9DECD80}" type="datetimeFigureOut">
+            <a:fld id="{31456ECF-70C3-4720-9FAD-C606738E0BBF}" type="datetimeFigureOut">
               <a:rPr kumimoji="1" lang="ja-JP" altLang="en-US" smtClean="0"/>
               <a:t>2026/7/30</a:t>
             </a:fld>
@@ -2935,7 +2935,7 @@
           <p:cNvPr id="6" name="フッター プレースホルダー 5">
             <a:extLst>
               <a:ext uri="{FF2B5EF4-FFF2-40B4-BE49-F238E27FC236}">
-                <a16:creationId xmlns:a16="http://schemas.microsoft.com/office/drawing/2014/main" id="{423DF9F3-2A99-031C-9B79-5723FE130FC7}"/>
+                <a16:creationId xmlns:a16="http://schemas.microsoft.com/office/drawing/2014/main" id="{BA59DB3D-A912-23CF-E32D-3920A3E5424C}"/>
               </a:ext>
             </a:extLst>
           </p:cNvPr>
@@ -2960,7 +2960,7 @@
           <p:cNvPr id="7" name="スライド番号プレースホルダー 6">
             <a:extLst>
               <a:ext uri="{FF2B5EF4-FFF2-40B4-BE49-F238E27FC236}">
-                <a16:creationId xmlns:a16="http://schemas.microsoft.com/office/drawing/2014/main" id="{775858E7-446E-694F-B13F-430DFB6B9BF8}"/>
+                <a16:creationId xmlns:a16="http://schemas.microsoft.com/office/drawing/2014/main" id="{E78F7970-CB12-CD45-36AF-FD49E379323A}"/>
               </a:ext>
             </a:extLst>
           </p:cNvPr>
@@ -2976,7 +2976,7 @@
           <a:bodyPr/>
           <a:lstStyle/>
           <a:p>
-            <a:fld id="{043EC55A-0D47-41B3-AD36-51B34E2480AE}" type="slidenum">
+            <a:fld id="{697F2CE0-3434-4105-ABB8-872BEE615879}" type="slidenum">
               <a:rPr kumimoji="1" lang="ja-JP" altLang="en-US" smtClean="0"/>
               <a:t>‹#›</a:t>
             </a:fld>
@@ -2987,7 +2987,7 @@
     </p:spTree>
     <p:extLst>
       <p:ext uri="{BB962C8B-B14F-4D97-AF65-F5344CB8AC3E}">
-        <p14:creationId xmlns:p14="http://schemas.microsoft.com/office/powerpoint/2010/main" val="3136571589"/>
+        <p14:creationId xmlns:p14="http://schemas.microsoft.com/office/powerpoint/2010/main" val="692740517"/>
       </p:ext>
     </p:extLst>
   </p:cSld>
@@ -3024,7 +3024,7 @@
           <p:cNvPr id="2" name="タイトル プレースホルダー 1">
             <a:extLst>
               <a:ext uri="{FF2B5EF4-FFF2-40B4-BE49-F238E27FC236}">
-                <a16:creationId xmlns:a16="http://schemas.microsoft.com/office/drawing/2014/main" id="{4C7C4197-B79D-3E60-F0D1-DEF6DB0F85C5}"/>
+                <a16:creationId xmlns:a16="http://schemas.microsoft.com/office/drawing/2014/main" id="{AFF1D94B-0344-D0C1-7C71-2E7404E9BF7A}"/>
               </a:ext>
             </a:extLst>
           </p:cNvPr>
@@ -3062,7 +3062,7 @@
           <p:cNvPr id="3" name="テキスト プレースホルダー 2">
             <a:extLst>
               <a:ext uri="{FF2B5EF4-FFF2-40B4-BE49-F238E27FC236}">
-                <a16:creationId xmlns:a16="http://schemas.microsoft.com/office/drawing/2014/main" id="{14066086-DCE4-805C-F8D9-F16622AF6E47}"/>
+                <a16:creationId xmlns:a16="http://schemas.microsoft.com/office/drawing/2014/main" id="{F149AB65-B7FC-4A9A-0A17-610288D2CEF9}"/>
               </a:ext>
             </a:extLst>
           </p:cNvPr>
@@ -3161,7 +3161,7 @@
           <p:cNvPr id="4" name="日付プレースホルダー 3">
             <a:extLst>
               <a:ext uri="{FF2B5EF4-FFF2-40B4-BE49-F238E27FC236}">
-                <a16:creationId xmlns:a16="http://schemas.microsoft.com/office/drawing/2014/main" id="{6D75C0CC-ECC3-802B-FCAB-E1D8539DA3C2}"/>
+                <a16:creationId xmlns:a16="http://schemas.microsoft.com/office/drawing/2014/main" id="{CE2DA0DC-78F5-6F91-6EBA-179E3586E278}"/>
               </a:ext>
             </a:extLst>
           </p:cNvPr>
@@ -3195,7 +3195,7 @@
             </a:lvl1pPr>
           </a:lstStyle>
           <a:p>
-            <a:fld id="{69EFDE8D-40B8-48E0-BD24-41E6F9DECD80}" type="datetimeFigureOut">
+            <a:fld id="{31456ECF-70C3-4720-9FAD-C606738E0BBF}" type="datetimeFigureOut">
               <a:rPr kumimoji="1" lang="ja-JP" altLang="en-US" smtClean="0"/>
               <a:t>2026/7/30</a:t>
             </a:fld>
@@ -3208,7 +3208,7 @@
           <p:cNvPr id="5" name="フッター プレースホルダー 4">
             <a:extLst>
               <a:ext uri="{FF2B5EF4-FFF2-40B4-BE49-F238E27FC236}">
-                <a16:creationId xmlns:a16="http://schemas.microsoft.com/office/drawing/2014/main" id="{D23F1C42-22C2-7E00-1687-24093830C842}"/>
+                <a16:creationId xmlns:a16="http://schemas.microsoft.com/office/drawing/2014/main" id="{7F014145-04ED-C73A-5313-45E1C678DBDE}"/>
               </a:ext>
             </a:extLst>
           </p:cNvPr>
@@ -3251,7 +3251,7 @@
           <p:cNvPr id="6" name="スライド番号プレースホルダー 5">
             <a:extLst>
               <a:ext uri="{FF2B5EF4-FFF2-40B4-BE49-F238E27FC236}">
-                <a16:creationId xmlns:a16="http://schemas.microsoft.com/office/drawing/2014/main" id="{BC68A4C2-E368-2BC2-2098-D5C1276E7CD1}"/>
+                <a16:creationId xmlns:a16="http://schemas.microsoft.com/office/drawing/2014/main" id="{B139B308-8050-D7B4-1085-D1B1F8288F56}"/>
               </a:ext>
             </a:extLst>
           </p:cNvPr>
@@ -3285,7 +3285,7 @@
             </a:lvl1pPr>
           </a:lstStyle>
           <a:p>
-            <a:fld id="{043EC55A-0D47-41B3-AD36-51B34E2480AE}" type="slidenum">
+            <a:fld id="{697F2CE0-3434-4105-ABB8-872BEE615879}" type="slidenum">
               <a:rPr kumimoji="1" lang="ja-JP" altLang="en-US" smtClean="0"/>
               <a:t>‹#›</a:t>
             </a:fld>
@@ -3296,7 +3296,7 @@
     </p:spTree>
     <p:extLst>
       <p:ext uri="{BB962C8B-B14F-4D97-AF65-F5344CB8AC3E}">
-        <p14:creationId xmlns:p14="http://schemas.microsoft.com/office/powerpoint/2010/main" val="301332640"/>
+        <p14:creationId xmlns:p14="http://schemas.microsoft.com/office/powerpoint/2010/main" val="4010918865"/>
       </p:ext>
     </p:extLst>
   </p:cSld>
@@ -3619,7 +3619,7 @@
           <p:cNvPr id="2" name="テキスト ボックス 1">
             <a:extLst>
               <a:ext uri="{FF2B5EF4-FFF2-40B4-BE49-F238E27FC236}">
-                <a16:creationId xmlns:a16="http://schemas.microsoft.com/office/drawing/2014/main" id="{EB6234FD-6249-D8BC-308D-27442A6098AA}"/>
+                <a16:creationId xmlns:a16="http://schemas.microsoft.com/office/drawing/2014/main" id="{83E20BDD-E391-214B-87EB-3BCC7B947A26}"/>
               </a:ext>
             </a:extLst>
           </p:cNvPr>
@@ -3665,7 +3665,7 @@
           <p:cNvPr id="3" name="テキスト ボックス 2">
             <a:extLst>
               <a:ext uri="{FF2B5EF4-FFF2-40B4-BE49-F238E27FC236}">
-                <a16:creationId xmlns:a16="http://schemas.microsoft.com/office/drawing/2014/main" id="{DAA4768B-AF14-022B-D90A-39420E1B348C}"/>
+                <a16:creationId xmlns:a16="http://schemas.microsoft.com/office/drawing/2014/main" id="{54BCC21B-25CD-D9AF-3413-6394D01A115A}"/>
               </a:ext>
             </a:extLst>
           </p:cNvPr>
@@ -3714,7 +3714,7 @@
           <p:cNvPr id="4" name="テキスト ボックス 3">
             <a:extLst>
               <a:ext uri="{FF2B5EF4-FFF2-40B4-BE49-F238E27FC236}">
-                <a16:creationId xmlns:a16="http://schemas.microsoft.com/office/drawing/2014/main" id="{42CE3EDD-6CEB-DF05-D79F-36DAA130D12B}"/>
+                <a16:creationId xmlns:a16="http://schemas.microsoft.com/office/drawing/2014/main" id="{9B29E4ED-395D-0893-E6ED-78B8E1A13897}"/>
               </a:ext>
             </a:extLst>
           </p:cNvPr>
@@ -3754,7 +3754,7 @@
           <p:cNvPr id="5" name="テキスト ボックス 4">
             <a:extLst>
               <a:ext uri="{FF2B5EF4-FFF2-40B4-BE49-F238E27FC236}">
-                <a16:creationId xmlns:a16="http://schemas.microsoft.com/office/drawing/2014/main" id="{A5A5F727-D185-21D6-A67D-397D82BA891B}"/>
+                <a16:creationId xmlns:a16="http://schemas.microsoft.com/office/drawing/2014/main" id="{235AD2F5-EB2B-EAE9-E63D-54275707F807}"/>
               </a:ext>
             </a:extLst>
           </p:cNvPr>
@@ -3801,7 +3801,7 @@
             <a:hlinkClick r:id="" action="ppaction://media"/>
             <a:extLst>
               <a:ext uri="{FF2B5EF4-FFF2-40B4-BE49-F238E27FC236}">
-                <a16:creationId xmlns:a16="http://schemas.microsoft.com/office/drawing/2014/main" id="{41E1E80B-8875-89E3-5EC7-D3EAAB0DD6A4}"/>
+                <a16:creationId xmlns:a16="http://schemas.microsoft.com/office/drawing/2014/main" id="{ED82DDDE-48E0-7BF9-6868-7BB40A40D1CB}"/>
               </a:ext>
             </a:extLst>
           </p:cNvPr>
@@ -3836,7 +3836,7 @@
     </p:spTree>
     <p:extLst>
       <p:ext uri="{BB962C8B-B14F-4D97-AF65-F5344CB8AC3E}">
-        <p14:creationId xmlns:p14="http://schemas.microsoft.com/office/powerpoint/2010/main" val="740873246"/>
+        <p14:creationId xmlns:p14="http://schemas.microsoft.com/office/powerpoint/2010/main" val="1004420867"/>
       </p:ext>
     </p:extLst>
   </p:cSld>
@@ -3960,7 +3960,7 @@
           <p:cNvPr id="2" name="テキスト ボックス 1">
             <a:extLst>
               <a:ext uri="{FF2B5EF4-FFF2-40B4-BE49-F238E27FC236}">
-                <a16:creationId xmlns:a16="http://schemas.microsoft.com/office/drawing/2014/main" id="{9A36DAAE-C548-F04B-E921-B62307215D90}"/>
+                <a16:creationId xmlns:a16="http://schemas.microsoft.com/office/drawing/2014/main" id="{EAC42D48-4C84-33A5-B922-2C40FE66EA97}"/>
               </a:ext>
             </a:extLst>
           </p:cNvPr>
@@ -4006,7 +4006,7 @@
           <p:cNvPr id="3" name="テキスト ボックス 2">
             <a:extLst>
               <a:ext uri="{FF2B5EF4-FFF2-40B4-BE49-F238E27FC236}">
-                <a16:creationId xmlns:a16="http://schemas.microsoft.com/office/drawing/2014/main" id="{CE586864-1462-6760-8F59-07668A61B15C}"/>
+                <a16:creationId xmlns:a16="http://schemas.microsoft.com/office/drawing/2014/main" id="{5A8ED9BC-5868-3DD0-023D-5D7F310FABC1}"/>
               </a:ext>
             </a:extLst>
           </p:cNvPr>
@@ -4046,7 +4046,7 @@
           <p:cNvPr id="4" name="テキスト ボックス 3">
             <a:extLst>
               <a:ext uri="{FF2B5EF4-FFF2-40B4-BE49-F238E27FC236}">
-                <a16:creationId xmlns:a16="http://schemas.microsoft.com/office/drawing/2014/main" id="{39C3F212-3A18-B49E-5DE6-D9C8D86E8644}"/>
+                <a16:creationId xmlns:a16="http://schemas.microsoft.com/office/drawing/2014/main" id="{29E04D75-60F2-99C8-9E07-3CAB8E44260F}"/>
               </a:ext>
             </a:extLst>
           </p:cNvPr>
@@ -4076,14 +4076,17 @@
                 </a:solidFill>
                 <a:latin typeface="Arial" panose="020B0604020202020204" pitchFamily="34" charset="0"/>
               </a:rPr>
-              <a:t>vinext starter A clean full stack starter running on vinext https://github</a:t>
-            </a:r>
-            <a:endParaRPr kumimoji="1" lang="ja-JP" altLang="en-US" sz="2000">
-              <a:solidFill>
-                <a:srgbClr val="333333"/>
-              </a:solidFill>
-              <a:latin typeface="Arial" panose="020B0604020202020204" pitchFamily="34" charset="0"/>
-            </a:endParaRPr>
+              <a:t>Asia Trip Concierge</a:t>
+            </a:r>
+            <a:r>
+              <a:rPr kumimoji="1" lang="ja-JP" altLang="en-US" sz="2000">
+                <a:solidFill>
+                  <a:srgbClr val="333333"/>
+                </a:solidFill>
+                <a:latin typeface="Arial" panose="020B0604020202020204" pitchFamily="34" charset="0"/>
+              </a:rPr>
+              <a:t>の目的、構成、実装を公開コードから確認できるプロジェクトです。</a:t>
+            </a:r>
           </a:p>
         </p:txBody>
       </p:sp>
@@ -4092,7 +4095,7 @@
           <p:cNvPr id="5" name="テキスト ボックス 4">
             <a:extLst>
               <a:ext uri="{FF2B5EF4-FFF2-40B4-BE49-F238E27FC236}">
-                <a16:creationId xmlns:a16="http://schemas.microsoft.com/office/drawing/2014/main" id="{A50D5464-4FCC-363D-F84F-48FE8E088167}"/>
+                <a16:creationId xmlns:a16="http://schemas.microsoft.com/office/drawing/2014/main" id="{F323374E-8C0F-B87B-3D0D-DAC95352849A}"/>
               </a:ext>
             </a:extLst>
           </p:cNvPr>
@@ -4139,7 +4142,7 @@
             <a:hlinkClick r:id="" action="ppaction://media"/>
             <a:extLst>
               <a:ext uri="{FF2B5EF4-FFF2-40B4-BE49-F238E27FC236}">
-                <a16:creationId xmlns:a16="http://schemas.microsoft.com/office/drawing/2014/main" id="{BB81ECF5-DB27-1EF3-C454-86E65B797FF9}"/>
+                <a16:creationId xmlns:a16="http://schemas.microsoft.com/office/drawing/2014/main" id="{1E917497-C00C-1AF9-C5F9-BDBFCBA6E75A}"/>
               </a:ext>
             </a:extLst>
           </p:cNvPr>
@@ -4174,7 +4177,7 @@
     </p:spTree>
     <p:extLst>
       <p:ext uri="{BB962C8B-B14F-4D97-AF65-F5344CB8AC3E}">
-        <p14:creationId xmlns:p14="http://schemas.microsoft.com/office/powerpoint/2010/main" val="558408830"/>
+        <p14:creationId xmlns:p14="http://schemas.microsoft.com/office/powerpoint/2010/main" val="216465632"/>
       </p:ext>
     </p:extLst>
   </p:cSld>
@@ -4217,7 +4220,7 @@
                                   <p:childTnLst>
                                     <p:cmd type="call" cmd="playFrom(0.0)">
                                       <p:cBhvr>
-                                        <p:cTn id="6" dur="7955" fill="hold"/>
+                                        <p:cTn id="6" dur="7611" fill="hold"/>
                                         <p:tgtEl>
                                           <p:spTgt spid="6"/>
                                         </p:tgtEl>
@@ -4298,7 +4301,7 @@
           <p:cNvPr id="2" name="テキスト ボックス 1">
             <a:extLst>
               <a:ext uri="{FF2B5EF4-FFF2-40B4-BE49-F238E27FC236}">
-                <a16:creationId xmlns:a16="http://schemas.microsoft.com/office/drawing/2014/main" id="{6FD92DE6-0FAD-A69B-7A88-0440252D1A84}"/>
+                <a16:creationId xmlns:a16="http://schemas.microsoft.com/office/drawing/2014/main" id="{DAC16864-AE3E-FEA6-A001-A58F1B34A0E3}"/>
               </a:ext>
             </a:extLst>
           </p:cNvPr>
@@ -4344,7 +4347,7 @@
           <p:cNvPr id="3" name="テキスト ボックス 2">
             <a:extLst>
               <a:ext uri="{FF2B5EF4-FFF2-40B4-BE49-F238E27FC236}">
-                <a16:creationId xmlns:a16="http://schemas.microsoft.com/office/drawing/2014/main" id="{7B65812B-60F8-66EA-1004-F3E0B4D982CF}"/>
+                <a16:creationId xmlns:a16="http://schemas.microsoft.com/office/drawing/2014/main" id="{B4F7E84F-DC88-5034-6C1F-A75AAF56A06F}"/>
               </a:ext>
             </a:extLst>
           </p:cNvPr>
@@ -4384,7 +4387,7 @@
           <p:cNvPr id="4" name="テキスト ボックス 3">
             <a:extLst>
               <a:ext uri="{FF2B5EF4-FFF2-40B4-BE49-F238E27FC236}">
-                <a16:creationId xmlns:a16="http://schemas.microsoft.com/office/drawing/2014/main" id="{615C8093-2EF1-5CB6-FD17-532636FC89B4}"/>
+                <a16:creationId xmlns:a16="http://schemas.microsoft.com/office/drawing/2014/main" id="{BBA77AE4-472B-A7B4-9B84-556D36BAAE38}"/>
               </a:ext>
             </a:extLst>
           </p:cNvPr>
@@ -4461,7 +4464,7 @@
           <p:cNvPr id="5" name="テキスト ボックス 4">
             <a:extLst>
               <a:ext uri="{FF2B5EF4-FFF2-40B4-BE49-F238E27FC236}">
-                <a16:creationId xmlns:a16="http://schemas.microsoft.com/office/drawing/2014/main" id="{E9EE3878-F7DD-AE6C-523B-FF3B51313736}"/>
+                <a16:creationId xmlns:a16="http://schemas.microsoft.com/office/drawing/2014/main" id="{14E3F7ED-F311-9511-16BE-4C3E433F9B8A}"/>
               </a:ext>
             </a:extLst>
           </p:cNvPr>
@@ -4508,7 +4511,7 @@
             <a:hlinkClick r:id="" action="ppaction://media"/>
             <a:extLst>
               <a:ext uri="{FF2B5EF4-FFF2-40B4-BE49-F238E27FC236}">
-                <a16:creationId xmlns:a16="http://schemas.microsoft.com/office/drawing/2014/main" id="{DA56C640-2BC6-1CBC-C8AB-7C66202D1636}"/>
+                <a16:creationId xmlns:a16="http://schemas.microsoft.com/office/drawing/2014/main" id="{09AEA53F-37F7-3EEC-B4C4-E0D9C040050F}"/>
               </a:ext>
             </a:extLst>
           </p:cNvPr>
@@ -4543,7 +4546,7 @@
     </p:spTree>
     <p:extLst>
       <p:ext uri="{BB962C8B-B14F-4D97-AF65-F5344CB8AC3E}">
-        <p14:creationId xmlns:p14="http://schemas.microsoft.com/office/powerpoint/2010/main" val="2263878779"/>
+        <p14:creationId xmlns:p14="http://schemas.microsoft.com/office/powerpoint/2010/main" val="2238643168"/>
       </p:ext>
     </p:extLst>
   </p:cSld>
@@ -4667,7 +4670,7 @@
           <p:cNvPr id="2" name="テキスト ボックス 1">
             <a:extLst>
               <a:ext uri="{FF2B5EF4-FFF2-40B4-BE49-F238E27FC236}">
-                <a16:creationId xmlns:a16="http://schemas.microsoft.com/office/drawing/2014/main" id="{588DC0F7-257D-C564-67DC-FF9A163CFD1D}"/>
+                <a16:creationId xmlns:a16="http://schemas.microsoft.com/office/drawing/2014/main" id="{AEDBA95A-C88B-94AC-C867-0290AA974763}"/>
               </a:ext>
             </a:extLst>
           </p:cNvPr>
@@ -4713,7 +4716,7 @@
           <p:cNvPr id="3" name="テキスト ボックス 2">
             <a:extLst>
               <a:ext uri="{FF2B5EF4-FFF2-40B4-BE49-F238E27FC236}">
-                <a16:creationId xmlns:a16="http://schemas.microsoft.com/office/drawing/2014/main" id="{DBCB3EE6-A1DB-0E72-BBC6-44C2577F6E01}"/>
+                <a16:creationId xmlns:a16="http://schemas.microsoft.com/office/drawing/2014/main" id="{3E4B6D1C-7B79-B0BB-BEAC-24BF16C22493}"/>
               </a:ext>
             </a:extLst>
           </p:cNvPr>
@@ -4753,7 +4756,7 @@
           <p:cNvPr id="4" name="テキスト ボックス 3">
             <a:extLst>
               <a:ext uri="{FF2B5EF4-FFF2-40B4-BE49-F238E27FC236}">
-                <a16:creationId xmlns:a16="http://schemas.microsoft.com/office/drawing/2014/main" id="{D4E50D3C-12A0-A1F9-1310-7421E3D6269A}"/>
+                <a16:creationId xmlns:a16="http://schemas.microsoft.com/office/drawing/2014/main" id="{F9F8E5FE-24C6-03A1-691E-5E4D5D66C1A7}"/>
               </a:ext>
             </a:extLst>
           </p:cNvPr>
@@ -4863,7 +4866,7 @@
           <p:cNvPr id="5" name="テキスト ボックス 4">
             <a:extLst>
               <a:ext uri="{FF2B5EF4-FFF2-40B4-BE49-F238E27FC236}">
-                <a16:creationId xmlns:a16="http://schemas.microsoft.com/office/drawing/2014/main" id="{7E2391DE-B4FA-6F99-F6E7-9C0F8082B619}"/>
+                <a16:creationId xmlns:a16="http://schemas.microsoft.com/office/drawing/2014/main" id="{7B168F0E-A2EF-802B-127E-69E6FCA28409}"/>
               </a:ext>
             </a:extLst>
           </p:cNvPr>
@@ -4910,7 +4913,7 @@
             <a:hlinkClick r:id="" action="ppaction://media"/>
             <a:extLst>
               <a:ext uri="{FF2B5EF4-FFF2-40B4-BE49-F238E27FC236}">
-                <a16:creationId xmlns:a16="http://schemas.microsoft.com/office/drawing/2014/main" id="{311B754F-1526-6919-B375-9199A8CDE0AD}"/>
+                <a16:creationId xmlns:a16="http://schemas.microsoft.com/office/drawing/2014/main" id="{30AE103D-0B8F-A77C-01D2-2789A8972644}"/>
               </a:ext>
             </a:extLst>
           </p:cNvPr>
@@ -4945,7 +4948,7 @@
     </p:spTree>
     <p:extLst>
       <p:ext uri="{BB962C8B-B14F-4D97-AF65-F5344CB8AC3E}">
-        <p14:creationId xmlns:p14="http://schemas.microsoft.com/office/powerpoint/2010/main" val="2526142639"/>
+        <p14:creationId xmlns:p14="http://schemas.microsoft.com/office/powerpoint/2010/main" val="2596959044"/>
       </p:ext>
     </p:extLst>
   </p:cSld>
@@ -5069,7 +5072,7 @@
           <p:cNvPr id="2" name="テキスト ボックス 1">
             <a:extLst>
               <a:ext uri="{FF2B5EF4-FFF2-40B4-BE49-F238E27FC236}">
-                <a16:creationId xmlns:a16="http://schemas.microsoft.com/office/drawing/2014/main" id="{772399A2-E5D9-5437-F9AD-7F762743BCF0}"/>
+                <a16:creationId xmlns:a16="http://schemas.microsoft.com/office/drawing/2014/main" id="{2443567A-5350-87F1-4791-895E0DD3E740}"/>
               </a:ext>
             </a:extLst>
           </p:cNvPr>
@@ -5115,7 +5118,7 @@
           <p:cNvPr id="3" name="テキスト ボックス 2">
             <a:extLst>
               <a:ext uri="{FF2B5EF4-FFF2-40B4-BE49-F238E27FC236}">
-                <a16:creationId xmlns:a16="http://schemas.microsoft.com/office/drawing/2014/main" id="{C3DAB66F-3E43-F4BE-7A9F-654FAD69A147}"/>
+                <a16:creationId xmlns:a16="http://schemas.microsoft.com/office/drawing/2014/main" id="{F96C68A3-75D1-9991-6C14-286D0597C6E9}"/>
               </a:ext>
             </a:extLst>
           </p:cNvPr>
@@ -5155,7 +5158,7 @@
           <p:cNvPr id="4" name="テキスト ボックス 3">
             <a:extLst>
               <a:ext uri="{FF2B5EF4-FFF2-40B4-BE49-F238E27FC236}">
-                <a16:creationId xmlns:a16="http://schemas.microsoft.com/office/drawing/2014/main" id="{4E96D545-2533-8D83-638F-914C1F9BFBA4}"/>
+                <a16:creationId xmlns:a16="http://schemas.microsoft.com/office/drawing/2014/main" id="{CEF95F40-68FA-FE7C-ED01-D40BB70F3648}"/>
               </a:ext>
             </a:extLst>
           </p:cNvPr>
@@ -5179,20 +5182,14 @@
           <a:lstStyle/>
           <a:p>
             <a:r>
-              <a:rPr kumimoji="1" lang="en-US" altLang="ja-JP" sz="2000">
+              <a:rPr kumimoji="1" lang="ja-JP" altLang="en-US" sz="2000">
                 <a:solidFill>
                   <a:srgbClr val="333333"/>
                 </a:solidFill>
                 <a:latin typeface="Arial" panose="020B0604020202020204" pitchFamily="34" charset="0"/>
               </a:rPr>
-              <a:t>Configure private site hosting</a:t>
-            </a:r>
-            <a:endParaRPr kumimoji="1" lang="ja-JP" altLang="en-US" sz="2000">
-              <a:solidFill>
-                <a:srgbClr val="333333"/>
-              </a:solidFill>
-              <a:latin typeface="Arial" panose="020B0604020202020204" pitchFamily="34" charset="0"/>
-            </a:endParaRPr>
+              <a:t>直近のコミットでは、実装の見直しと継続的な改善が行われました。</a:t>
+            </a:r>
           </a:p>
         </p:txBody>
       </p:sp>
@@ -5201,7 +5198,7 @@
           <p:cNvPr id="5" name="テキスト ボックス 4">
             <a:extLst>
               <a:ext uri="{FF2B5EF4-FFF2-40B4-BE49-F238E27FC236}">
-                <a16:creationId xmlns:a16="http://schemas.microsoft.com/office/drawing/2014/main" id="{DB5666C7-3D5B-F30D-2184-BAD9264C7FC5}"/>
+                <a16:creationId xmlns:a16="http://schemas.microsoft.com/office/drawing/2014/main" id="{9573329C-0D68-922F-863C-3EA5491A43E3}"/>
               </a:ext>
             </a:extLst>
           </p:cNvPr>
@@ -5248,7 +5245,7 @@
             <a:hlinkClick r:id="" action="ppaction://media"/>
             <a:extLst>
               <a:ext uri="{FF2B5EF4-FFF2-40B4-BE49-F238E27FC236}">
-                <a16:creationId xmlns:a16="http://schemas.microsoft.com/office/drawing/2014/main" id="{5DCF2842-CB10-AD23-0D3B-55449D21292D}"/>
+                <a16:creationId xmlns:a16="http://schemas.microsoft.com/office/drawing/2014/main" id="{AF8A498C-DADE-FA4C-B4AB-3DDE9013CA9E}"/>
               </a:ext>
             </a:extLst>
           </p:cNvPr>
@@ -5283,7 +5280,7 @@
     </p:spTree>
     <p:extLst>
       <p:ext uri="{BB962C8B-B14F-4D97-AF65-F5344CB8AC3E}">
-        <p14:creationId xmlns:p14="http://schemas.microsoft.com/office/powerpoint/2010/main" val="1394218428"/>
+        <p14:creationId xmlns:p14="http://schemas.microsoft.com/office/powerpoint/2010/main" val="111602605"/>
       </p:ext>
     </p:extLst>
   </p:cSld>
@@ -5326,7 +5323,7 @@
                                   <p:childTnLst>
                                     <p:cmd type="call" cmd="playFrom(0.0)">
                                       <p:cBhvr>
-                                        <p:cTn id="6" dur="6621" fill="hold"/>
+                                        <p:cTn id="6" dur="6076" fill="hold"/>
                                         <p:tgtEl>
                                           <p:spTgt spid="6"/>
                                         </p:tgtEl>
@@ -5407,7 +5404,7 @@
           <p:cNvPr id="2" name="テキスト ボックス 1">
             <a:extLst>
               <a:ext uri="{FF2B5EF4-FFF2-40B4-BE49-F238E27FC236}">
-                <a16:creationId xmlns:a16="http://schemas.microsoft.com/office/drawing/2014/main" id="{A479817F-D975-B443-3EBA-258C89ECD804}"/>
+                <a16:creationId xmlns:a16="http://schemas.microsoft.com/office/drawing/2014/main" id="{82B8901E-8923-56FB-7986-F079E9646D56}"/>
               </a:ext>
             </a:extLst>
           </p:cNvPr>
@@ -5453,7 +5450,7 @@
           <p:cNvPr id="3" name="テキスト ボックス 2">
             <a:extLst>
               <a:ext uri="{FF2B5EF4-FFF2-40B4-BE49-F238E27FC236}">
-                <a16:creationId xmlns:a16="http://schemas.microsoft.com/office/drawing/2014/main" id="{F7C4AD14-83D0-6279-7889-1F6552F08C88}"/>
+                <a16:creationId xmlns:a16="http://schemas.microsoft.com/office/drawing/2014/main" id="{7513F0CB-D35F-F9F1-AF31-09106F7E1A38}"/>
               </a:ext>
             </a:extLst>
           </p:cNvPr>
@@ -5493,7 +5490,7 @@
           <p:cNvPr id="4" name="テキスト ボックス 3">
             <a:extLst>
               <a:ext uri="{FF2B5EF4-FFF2-40B4-BE49-F238E27FC236}">
-                <a16:creationId xmlns:a16="http://schemas.microsoft.com/office/drawing/2014/main" id="{BFE7EDAF-6D8E-AA4F-FBC9-4CA2ABA8F353}"/>
+                <a16:creationId xmlns:a16="http://schemas.microsoft.com/office/drawing/2014/main" id="{80086458-D3EB-7A0F-61F6-FA2341482EC9}"/>
               </a:ext>
             </a:extLst>
           </p:cNvPr>
@@ -5558,7 +5555,7 @@
           <p:cNvPr id="5" name="テキスト ボックス 4">
             <a:extLst>
               <a:ext uri="{FF2B5EF4-FFF2-40B4-BE49-F238E27FC236}">
-                <a16:creationId xmlns:a16="http://schemas.microsoft.com/office/drawing/2014/main" id="{42DCFCFA-A1CE-879F-A846-F9B85465297A}"/>
+                <a16:creationId xmlns:a16="http://schemas.microsoft.com/office/drawing/2014/main" id="{AC729853-E579-8799-AB87-ADE2C13DABE8}"/>
               </a:ext>
             </a:extLst>
           </p:cNvPr>
@@ -5605,7 +5602,7 @@
             <a:hlinkClick r:id="" action="ppaction://media"/>
             <a:extLst>
               <a:ext uri="{FF2B5EF4-FFF2-40B4-BE49-F238E27FC236}">
-                <a16:creationId xmlns:a16="http://schemas.microsoft.com/office/drawing/2014/main" id="{AD65D564-9A4A-1CDD-41DC-3D134CE88AA5}"/>
+                <a16:creationId xmlns:a16="http://schemas.microsoft.com/office/drawing/2014/main" id="{59156A1B-30DF-2822-4A79-1C631C127695}"/>
               </a:ext>
             </a:extLst>
           </p:cNvPr>
@@ -5640,7 +5637,7 @@
     </p:spTree>
     <p:extLst>
       <p:ext uri="{BB962C8B-B14F-4D97-AF65-F5344CB8AC3E}">
-        <p14:creationId xmlns:p14="http://schemas.microsoft.com/office/powerpoint/2010/main" val="805131905"/>
+        <p14:creationId xmlns:p14="http://schemas.microsoft.com/office/powerpoint/2010/main" val="3663963567"/>
       </p:ext>
     </p:extLst>
   </p:cSld>
